--- a/presentations/AI_Accelerators_1hr_walkthrough.pptx
+++ b/presentations/AI_Accelerators_1hr_walkthrough.pptx
@@ -524,7 +524,7 @@
           <a:p>
             <a:r>
               <a:rPr lang="en-US" dirty="0"/>
-              <a:t/>
+              <a:t>Framing. Two hardware transitions: CPU→GPU, and now GPU→specialized accelerators. Audience is software/systems, so I introduce each hardware concept conceptually. Core thesis: software optimization keeps hitting PHYSICAL limits — the limits, not software failure, drive specialization. Set expectation: light on products, heavy on the physics and economics.</a:t>
             </a:r>
             <a:endParaRPr lang="en-US" dirty="0"/>
           </a:p>
@@ -612,7 +612,7 @@
           <a:p>
             <a:r>
               <a:rPr lang="en-US" dirty="0"/>
-              <a:t/>
+              <a:t>Mixture-of-experts routes each token to a few experts, which may live on different devices. The all-to-all exchange can be ~1/3 of a training step. So as models get sparser, the bottleneck moves into the NETWORK FABRIC, not the arithmetic — which is why interconnect (NVLink, UALink, Ethernet) becomes a competitive axis later.</a:t>
             </a:r>
             <a:endParaRPr lang="en-US" dirty="0"/>
           </a:p>
@@ -700,7 +700,7 @@
           <a:p>
             <a:r>
               <a:rPr lang="en-US" dirty="0"/>
-              <a:t/>
+              <a:t>Be fair to software first — this earns credibility. FlashAttention ~3× from IO-awareness, vLLM 2-4× from paged KV + continuous batching. These are huge and real. BUT each success reveals a residual bound it can't cross (MoE all-to-all still ~34%; always-on still &lt;300µW). The hardware case is exactly that RESIDUE — never "software failed."</a:t>
             </a:r>
             <a:endParaRPr lang="en-US" dirty="0"/>
           </a:p>
@@ -788,7 +788,7 @@
           <a:p>
             <a:r>
               <a:rPr lang="en-US" dirty="0"/>
-              <a:t/>
+              <a:t>Framework, part 1. Any processor makes six promises to software: execution, data placement, numerical, scheduling, communication, software/tooling. A workload's "signature" stresses only SOME of them. A new architecture is justified only where it changes a contract the workload actually stresses — otherwise you've built a faster answer to a question nobody asked.</a:t>
             </a:r>
             <a:endParaRPr lang="en-US" dirty="0"/>
           </a:p>
@@ -876,7 +876,7 @@
           <a:p>
             <a:r>
               <a:rPr lang="en-US" dirty="0"/>
-              <a:t/>
+              <a:t>Framework, part 2 — the test that makes the whole talk decidable. Four conditions, ALL must hold. Three real outcomes from identical reasoning: TPU v1 → specialize (all four held, published 15-30× throughput, 30-80× perf/W under latency SLOs); Nervana/Graphcore → good silicon, condition 4 failed (no volume, CUDA switching cost); enterprise private serving → stay on GPU (conditions 2 &amp; 4 fail). Condition 4 = volume + software enablement cost — it decides the majority of real cases.</a:t>
             </a:r>
             <a:endParaRPr lang="en-US" dirty="0"/>
           </a:p>
@@ -964,7 +964,7 @@
           <a:p>
             <a:r>
               <a:rPr lang="en-US" dirty="0"/>
-              <a:t/>
+              <a:t>Why the GPU keeps winning the middle — and where it can't. ABSORBED into the GPU platform: matrix density, narrow precision (FP8/FP4), movement overhead, scale-up comms — these just become GPU features (tensor cores, NVLink). STRUCTURALLY NOT absorbable: wake-scope energy, provable worst-case timing, near-sensor locality, embedded cost floors — absorbing them would mean abandoning what makes a GPU a GPU. The CONTESTED middle (low-batch decode, MoE routing, near-memory lookup) is exactly where the commercial fights happen.</a:t>
             </a:r>
             <a:endParaRPr lang="en-US" dirty="0"/>
           </a:p>
@@ -1052,7 +1052,7 @@
           <a:p>
             <a:r>
               <a:rPr lang="en-US" dirty="0"/>
-              <a:t/>
+              <a:t>Two axes organize every family. Horizontal: WHEN execution uncertainty is resolved — runtime (GPU) → compile time (tensor/dataflow) → design time (fixed-function) → input-driven (neuromorphic). Vertical: WHERE state lives relative to arithmetic — DRAM → on-chip SRAM → inside memory. Every family is a displacement from the CPU/GPU baseline. No point dominates — each purchase of efficiency narrows a envelope — which is why the landscape stays permanently plural.</a:t>
             </a:r>
             <a:endParaRPr lang="en-US" dirty="0"/>
           </a:p>
@@ -1140,7 +1140,7 @@
           <a:p>
             <a:r>
               <a:rPr lang="en-US" dirty="0"/>
-              <a:t/>
+              <a:t>The eight families — each is ONE contract change, not "a faster chip." Read them as answers to "which promise did you renegotiate?": systolic = reuse geometry; tensor processor = compiler owns the schedule; dataflow = static, deterministic timing; NPU = design around power domains; FPGA = set structure after manufacturing; wafer-scale = make inter-chip comms on-wafer; PIM = move compute into memory; neuromorphic = let the input schedule the machine. Grouped by contract, not vendor — that's why the taxonomy outlives the product names.</a:t>
             </a:r>
             <a:endParaRPr lang="en-US" dirty="0"/>
           </a:p>
@@ -1228,7 +1228,7 @@
           <a:p>
             <a:r>
               <a:rPr lang="en-US" dirty="0"/>
-              <a:t/>
+              <a:t>IMPORTANT — this is an OBSERVATION about ubiquity + structural fit, NOT a claim that NPUs do most client AI compute. Hard facts (class A): every mainstream client SoC ships an NPU; Microsoft Copilot+ mandates ≥40 TOPS (Intel ~48, AMD ~50, Qualcomm 45-85, Apple Neural Engine in every chip since 2017). They're positioned for sustained/ambient low-power work. COUNTER-FACT: heavy local generative inference still runs mostly on the client GPU (CUDA/DirectML) — PCWorld's "the great NPU failure" — because NPU software/operator coverage lags; measured NPU utilization is low. So TOPS ≠ usage. The defensible claim is the takeaway: wake-scope energy and per-unit cost floors are structurally OUTSIDE the GPU contract, so the edge is where specialization is safest. If asked "observation or prediction?": mostly observation (ubiquity + structural niche) plus a conditional forward claim; the word "own" overstates and I've softened it.</a:t>
             </a:r>
             <a:endParaRPr lang="en-US" dirty="0"/>
           </a:p>
@@ -1316,7 +1316,7 @@
           <a:p>
             <a:r>
               <a:rPr lang="en-US" dirty="0"/>
-              <a:t/>
+              <a:t>Processing-in-memory attacks exactly the bounds we measured (decode streaming, embedding gather, mobile wake energy). Three flavors: in-DRAM SIMD (Samsung Aquabolt-XL, UPMEM), all-SRAM inference (IBM NorthPole), tiered capacity (SambaNova SN40L). It has the STRONGEST condition-3 case in the survey — the lever genuinely changes the bound, doesn't just relocate it. Gated by ONE thing: no portable programming model. Watch for the first mainstream part whose datasheet advertises in-memory ops.</a:t>
             </a:r>
             <a:endParaRPr lang="en-US" dirty="0"/>
           </a:p>
@@ -1404,7 +1404,7 @@
           <a:p>
             <a:r>
               <a:rPr lang="en-US" dirty="0"/>
-              <a:t/>
+              <a:t>The same families appear from microwatt silicon to megawatt pods — resized against different binding constraints. Ideas migrate BOTH ways: unified memory and power discipline go up from phones into the datacenter; quantization and compilation come down. Implementations diverge because each deployment class prices the stressors differently (rack power vs battery, tenancy vs wake scope). Argues for ONE shared taxonomy, not two industries.</a:t>
             </a:r>
             <a:endParaRPr lang="en-US" dirty="0"/>
           </a:p>
@@ -1492,7 +1492,7 @@
           <a:p>
             <a:r>
               <a:rPr lang="en-US" dirty="0"/>
-              <a:t/>
+              <a:t>Roadmap. Deliberately NOT a product tour — the products change every quarter; the framework doesn't. Six movements. Tell them the payoff up front: by the end they'll have a repeatable test for "is a specialized accelerator justified here?"</a:t>
             </a:r>
             <a:endParaRPr lang="en-US" dirty="0"/>
           </a:p>
@@ -1580,7 +1580,7 @@
           <a:p>
             <a:r>
               <a:rPr lang="en-US" dirty="0"/>
-              <a:t/>
+              <a:t>The landscape in three buckets, read through condition 4 — NOT a product catalog. (1) GPU incumbents (NVIDIA, AMD): absorb bounds, sell rack-scale. (2) Hyperscaler tensor processors (TPU, Trainium, Maia, MTIA): condition 4 met at owner scale — every major cloud now builds one. (3) Independent challengers: Groq licensed into NVIDIA, Cerebras survives on anchor tenancy + IPO, Tenstorrent in acquisition talks, SambaNova an appliance vendor. Punchline: NONE failed on architecture — every outcome was decided by software capital, volume, and distribution.</a:t>
             </a:r>
             <a:endParaRPr lang="en-US" dirty="0"/>
           </a:p>
@@ -1668,7 +1668,7 @@
           <a:p>
             <a:r>
               <a:rPr lang="en-US" dirty="0"/>
-              <a:t/>
+              <a:t>Economics in one chart (numbers illustrative). The fixed cost of specialization is dominated by SOFTWARE enablement (compiler, validation, migration), not silicon. Recurring savings scale with volume; the fixed cost doesn't. So there's a volume threshold: below it, no efficiency percentage rescues the case; above it, even small percentages justify huge programs. This is the arithmetic behind "same architecture, opposite verdicts" — hyperscale vs enterprise differ mainly in the denominator. Also price flexibility as option value: a 20% win today assumes the workload holds still.</a:t>
             </a:r>
             <a:endParaRPr lang="en-US" dirty="0"/>
           </a:p>
@@ -1756,7 +1756,7 @@
           <a:p>
             <a:r>
               <a:rPr lang="en-US" dirty="0"/>
-              <a:t/>
+              <a:t>Six findings, each traceable to evidence shown earlier. The two to leave ringing: (C) condition 4 — software capital — decides most outcomes, so audit the software stack before comparing silicon; and (E) the bounds have moved to memory, fabric, and facility power — arithmetic peak no longer separates serious contenders. If they remember one test, it's the four conditions.</a:t>
             </a:r>
             <a:endParaRPr lang="en-US" dirty="0"/>
           </a:p>
@@ -1844,7 +1844,7 @@
           <a:p>
             <a:r>
               <a:rPr lang="en-US" dirty="0"/>
-              <a:t/>
+              <a:t>Land the one-sentence summary and stop. Software succeeds until it exposes a bound; that bound is absorbed / escaped by changing a contract / lived with — and the DEPLOYMENT CLASS decides which. Invite the necessity test as the takeaway tool. Q&amp;A prompts likely: NPU-vs-GPU on client, whether hyperscaler silicon kills NVIDIA (no — absorption + condition 4), and PIM timing.</a:t>
             </a:r>
             <a:endParaRPr lang="en-US" dirty="0"/>
           </a:p>
@@ -1932,7 +1932,7 @@
           <a:p>
             <a:r>
               <a:rPr lang="en-US" dirty="0"/>
-              <a:t/>
+              <a:t>Vocabulary for a software audience — spend ~2 min. The two ideas to plant: (1) HBM bandwidth, not FLOPS, is usually the scarce resource; (2) "contract" — hardware makes promises to software, and specialization means CHANGING one of those promises. TOPS is marketing; return to this when we hit the client landscape.</a:t>
             </a:r>
             <a:endParaRPr lang="en-US" dirty="0"/>
           </a:p>
@@ -2020,7 +2020,7 @@
           <a:p>
             <a:r>
               <a:rPr lang="en-US" dirty="0"/>
-              <a:t/>
+              <a:t>The organizing thesis. Both transitions occurred because software optimization exposed limits it could no longer move economically — not because software failed. Stress: each transition ADDS an execution domain; CPUs and GPUs don't go away. The three lanes (datacenter / mobile / embedded) hit the SAME pattern under DIFFERENT dominant constraints — we'll follow all three.</a:t>
             </a:r>
             <a:endParaRPr lang="en-US" dirty="0"/>
           </a:p>
@@ -2108,7 +2108,7 @@
           <a:p>
             <a:r>
               <a:rPr lang="en-US" dirty="0"/>
-              <a:t/>
+              <a:t>The single most important hardware fact for software people. Horowitz 45nm numbers: an FP add ~0.9 pJ; a DRAM word read ~640 pJ — roughly 700×. So the bottleneck and the energy bill are set by data movement, not by the math unit. This one slide justifies almost every family later: they all move less data or move it a shorter distance. (Numbers are process-node specific but the ratio holds.)</a:t>
             </a:r>
             <a:endParaRPr lang="en-US" dirty="0"/>
           </a:p>
@@ -2196,7 +2196,7 @@
           <a:p>
             <a:r>
               <a:rPr lang="en-US" dirty="0"/>
-              <a:t/>
+              <a:t>Memory is not one thing — it's a ladder trading capacity for latency and energy. "Memory-bound" hides many distinct problems: bandwidth, capacity, cache-line overfetch, irregular access, too little reuse. Caches only pay off when the working set is reused before eviction. Each rung is a different lever a specialized design can pull — remember this at the families section.</a:t>
             </a:r>
             <a:endParaRPr lang="en-US" dirty="0"/>
           </a:p>
@@ -2284,7 +2284,7 @@
           <a:p>
             <a:r>
               <a:rPr lang="en-US" dirty="0"/>
-              <a:t/>
+              <a:t>Where the transistors go. CPU spends area on making diverse, branchy code fast at low latency (caches, prediction, out-of-order). GPU spends it on many throughput lanes. Specialization is just the next step on the same axis: narrow the job further, get more useful work per mm² and per joule — but only for work that fits.</a:t>
             </a:r>
             <a:endParaRPr lang="en-US" dirty="0"/>
           </a:p>
@@ -2372,7 +2372,7 @@
           <a:p>
             <a:r>
               <a:rPr lang="en-US" dirty="0"/>
-              <a:t/>
+              <a:t>The keystone worked example. Generating one token for one sequence means streaming ALL ~70 GB of weights through HBM. At ~3.35 TB/s that's ~48 tokens/s — and you use ~0.3% of the matrix throughput. Author-computed from published datasheets; idealized upper bound. Punchline: adding FLOPS does nothing; only batching (amortize weight reads across sequences) or a changed memory contract helps. This is WHY 2025-26 silicon is going "inference-first" and memory-first.</a:t>
             </a:r>
             <a:endParaRPr lang="en-US" dirty="0"/>
           </a:p>
@@ -2460,7 +2460,7 @@
           <a:p>
             <a:r>
               <a:rPr lang="en-US" dirty="0"/>
-              <a:t/>
+              <a:t>"Wake scope" = which power domains must be awake to answer. It spans ~4 orders of magnitude, microwatts (always-on keyword spotting) to watts (cloud round-trip). Key: an always-on feature isn't just cheaper on a tiny engine — it's IMPOSSIBLE within a phone's battery budget on a GPU's submission/memory contract. This is a structural bound, and it's the strongest beyond-GPU territory (comes back at the NPU slide).</a:t>
             </a:r>
             <a:endParaRPr lang="en-US" dirty="0"/>
           </a:p>
@@ -3192,19 +3192,19 @@
         <p:spPr>
           <a:xfrm>
             <a:off x="457200" y="6473952"/>
-            <a:ext cx="6400800" cy="274320"/>
-          </a:xfrm>
-          <a:prstGeom prst="rect">
-            <a:avLst/>
-          </a:prstGeom>
-          <a:noFill/>
-          <a:ln/>
-        </p:spPr>
-        <p:txBody>
-          <a:bodyPr wrap="square" rtlCol="0" anchor="ctr"/>
-          <a:lstStyle/>
-          <a:p>
-            <a:pPr algn="l" indent="0" marL="0">
+            <a:ext cx="7315200" cy="274320"/>
+          </a:xfrm>
+          <a:prstGeom prst="rect">
+            <a:avLst/>
+          </a:prstGeom>
+          <a:noFill/>
+          <a:ln/>
+        </p:spPr>
+        <p:txBody>
+          <a:bodyPr wrap="square" rtlCol="0" anchor="ctr"/>
+          <a:lstStyle/>
+          <a:p>
+            <a:pPr indent="0" marL="0">
               <a:buNone/>
             </a:pPr>
             <a:r>
@@ -3875,19 +3875,19 @@
         <p:spPr>
           <a:xfrm>
             <a:off x="457200" y="6473952"/>
-            <a:ext cx="6400800" cy="274320"/>
-          </a:xfrm>
-          <a:prstGeom prst="rect">
-            <a:avLst/>
-          </a:prstGeom>
-          <a:noFill/>
-          <a:ln/>
-        </p:spPr>
-        <p:txBody>
-          <a:bodyPr wrap="square" rtlCol="0" anchor="ctr"/>
-          <a:lstStyle/>
-          <a:p>
-            <a:pPr algn="l" indent="0" marL="0">
+            <a:ext cx="7315200" cy="274320"/>
+          </a:xfrm>
+          <a:prstGeom prst="rect">
+            <a:avLst/>
+          </a:prstGeom>
+          <a:noFill/>
+          <a:ln/>
+        </p:spPr>
+        <p:txBody>
+          <a:bodyPr wrap="square" rtlCol="0" anchor="ctr"/>
+          <a:lstStyle/>
+          <a:p>
+            <a:pPr indent="0" marL="0">
               <a:buNone/>
             </a:pPr>
             <a:r>
@@ -4166,19 +4166,19 @@
         <p:spPr>
           <a:xfrm>
             <a:off x="457200" y="6473952"/>
-            <a:ext cx="6400800" cy="274320"/>
-          </a:xfrm>
-          <a:prstGeom prst="rect">
-            <a:avLst/>
-          </a:prstGeom>
-          <a:noFill/>
-          <a:ln/>
-        </p:spPr>
-        <p:txBody>
-          <a:bodyPr wrap="square" rtlCol="0" anchor="ctr"/>
-          <a:lstStyle/>
-          <a:p>
-            <a:pPr algn="l" indent="0" marL="0">
+            <a:ext cx="7315200" cy="274320"/>
+          </a:xfrm>
+          <a:prstGeom prst="rect">
+            <a:avLst/>
+          </a:prstGeom>
+          <a:noFill/>
+          <a:ln/>
+        </p:spPr>
+        <p:txBody>
+          <a:bodyPr wrap="square" rtlCol="0" anchor="ctr"/>
+          <a:lstStyle/>
+          <a:p>
+            <a:pPr indent="0" marL="0">
               <a:buNone/>
             </a:pPr>
             <a:r>
@@ -4376,7 +4376,7 @@
         </p:nvSpPr>
         <p:spPr>
           <a:xfrm>
-            <a:off x="8138160" y="1801368"/>
+            <a:off x="8138160" y="1847088"/>
             <a:ext cx="109728" cy="109728"/>
           </a:xfrm>
           <a:prstGeom prst="rect">
@@ -4396,8 +4396,8 @@
         </p:nvSpPr>
         <p:spPr>
           <a:xfrm>
-            <a:off x="8366760" y="1627632"/>
-            <a:ext cx="3291840" cy="640080"/>
+            <a:off x="8366760" y="1673352"/>
+            <a:ext cx="3291840" cy="731520"/>
           </a:xfrm>
           <a:prstGeom prst="rect">
             <a:avLst/>
@@ -4413,7 +4413,7 @@
               <a:buNone/>
             </a:pPr>
             <a:r>
-              <a:rPr lang="en-US" sz="1350" dirty="0">
+              <a:rPr lang="en-US" sz="1300" dirty="0">
                 <a:solidFill>
                   <a:srgbClr val="263947"/>
                 </a:solidFill>
@@ -4423,7 +4423,7 @@
               </a:rPr>
               <a:t>1 · residual bound remains</a:t>
             </a:r>
-            <a:endParaRPr lang="en-US" sz="1350" dirty="0"/>
+            <a:endParaRPr lang="en-US" sz="1300" dirty="0"/>
           </a:p>
         </p:txBody>
       </p:sp>
@@ -4435,7 +4435,7 @@
         </p:nvSpPr>
         <p:spPr>
           <a:xfrm>
-            <a:off x="8138160" y="2551176"/>
+            <a:off x="8138160" y="2596896"/>
             <a:ext cx="109728" cy="109728"/>
           </a:xfrm>
           <a:prstGeom prst="rect">
@@ -4455,8 +4455,8 @@
         </p:nvSpPr>
         <p:spPr>
           <a:xfrm>
-            <a:off x="8366760" y="2377440"/>
-            <a:ext cx="3291840" cy="640080"/>
+            <a:off x="8366760" y="2423160"/>
+            <a:ext cx="3291840" cy="731520"/>
           </a:xfrm>
           <a:prstGeom prst="rect">
             <a:avLst/>
@@ -4472,7 +4472,7 @@
               <a:buNone/>
             </a:pPr>
             <a:r>
-              <a:rPr lang="en-US" sz="1350" dirty="0">
+              <a:rPr lang="en-US" sz="1300" dirty="0">
                 <a:solidFill>
                   <a:srgbClr val="263947"/>
                 </a:solidFill>
@@ -4482,7 +4482,7 @@
               </a:rPr>
               <a:t>2 · it has a material consequence</a:t>
             </a:r>
-            <a:endParaRPr lang="en-US" sz="1350" dirty="0"/>
+            <a:endParaRPr lang="en-US" sz="1300" dirty="0"/>
           </a:p>
         </p:txBody>
       </p:sp>
@@ -4494,7 +4494,7 @@
         </p:nvSpPr>
         <p:spPr>
           <a:xfrm>
-            <a:off x="8138160" y="3300984"/>
+            <a:off x="8138160" y="3346704"/>
             <a:ext cx="109728" cy="109728"/>
           </a:xfrm>
           <a:prstGeom prst="rect">
@@ -4514,8 +4514,8 @@
         </p:nvSpPr>
         <p:spPr>
           <a:xfrm>
-            <a:off x="8366760" y="3127248"/>
-            <a:ext cx="3291840" cy="640080"/>
+            <a:off x="8366760" y="3172968"/>
+            <a:ext cx="3291840" cy="731520"/>
           </a:xfrm>
           <a:prstGeom prst="rect">
             <a:avLst/>
@@ -4531,7 +4531,7 @@
               <a:buNone/>
             </a:pPr>
             <a:r>
-              <a:rPr lang="en-US" sz="1350" dirty="0">
+              <a:rPr lang="en-US" sz="1300" dirty="0">
                 <a:solidFill>
                   <a:srgbClr val="263947"/>
                 </a:solidFill>
@@ -4541,7 +4541,7 @@
               </a:rPr>
               <a:t>3 · hardware changes the bound</a:t>
             </a:r>
-            <a:endParaRPr lang="en-US" sz="1350" dirty="0"/>
+            <a:endParaRPr lang="en-US" sz="1300" dirty="0"/>
           </a:p>
         </p:txBody>
       </p:sp>
@@ -4553,7 +4553,7 @@
         </p:nvSpPr>
         <p:spPr>
           <a:xfrm>
-            <a:off x="8138160" y="4050792"/>
+            <a:off x="8138160" y="4096512"/>
             <a:ext cx="109728" cy="109728"/>
           </a:xfrm>
           <a:prstGeom prst="rect">
@@ -4573,8 +4573,8 @@
         </p:nvSpPr>
         <p:spPr>
           <a:xfrm>
-            <a:off x="8366760" y="3877056"/>
-            <a:ext cx="3291840" cy="640080"/>
+            <a:off x="8366760" y="3922776"/>
+            <a:ext cx="3291840" cy="731520"/>
           </a:xfrm>
           <a:prstGeom prst="rect">
             <a:avLst/>
@@ -4590,7 +4590,7 @@
               <a:buNone/>
             </a:pPr>
             <a:r>
-              <a:rPr lang="en-US" sz="1350" dirty="0">
+              <a:rPr lang="en-US" sz="1300" dirty="0">
                 <a:solidFill>
                   <a:srgbClr val="263947"/>
                 </a:solidFill>
@@ -4600,7 +4600,7 @@
               </a:rPr>
               <a:t>4 · lifetime economics repay it</a:t>
             </a:r>
-            <a:endParaRPr lang="en-US" sz="1350" dirty="0"/>
+            <a:endParaRPr lang="en-US" sz="1300" dirty="0"/>
           </a:p>
         </p:txBody>
       </p:sp>
@@ -4693,19 +4693,19 @@
         <p:spPr>
           <a:xfrm>
             <a:off x="457200" y="6473952"/>
-            <a:ext cx="6400800" cy="274320"/>
-          </a:xfrm>
-          <a:prstGeom prst="rect">
-            <a:avLst/>
-          </a:prstGeom>
-          <a:noFill/>
-          <a:ln/>
-        </p:spPr>
-        <p:txBody>
-          <a:bodyPr wrap="square" rtlCol="0" anchor="ctr"/>
-          <a:lstStyle/>
-          <a:p>
-            <a:pPr algn="l" indent="0" marL="0">
+            <a:ext cx="7315200" cy="274320"/>
+          </a:xfrm>
+          <a:prstGeom prst="rect">
+            <a:avLst/>
+          </a:prstGeom>
+          <a:noFill/>
+          <a:ln/>
+        </p:spPr>
+        <p:txBody>
+          <a:bodyPr wrap="square" rtlCol="0" anchor="ctr"/>
+          <a:lstStyle/>
+          <a:p>
+            <a:pPr indent="0" marL="0">
               <a:buNone/>
             </a:pPr>
             <a:r>
@@ -4984,19 +4984,19 @@
         <p:spPr>
           <a:xfrm>
             <a:off x="457200" y="6473952"/>
-            <a:ext cx="6400800" cy="274320"/>
-          </a:xfrm>
-          <a:prstGeom prst="rect">
-            <a:avLst/>
-          </a:prstGeom>
-          <a:noFill/>
-          <a:ln/>
-        </p:spPr>
-        <p:txBody>
-          <a:bodyPr wrap="square" rtlCol="0" anchor="ctr"/>
-          <a:lstStyle/>
-          <a:p>
-            <a:pPr algn="l" indent="0" marL="0">
+            <a:ext cx="7315200" cy="274320"/>
+          </a:xfrm>
+          <a:prstGeom prst="rect">
+            <a:avLst/>
+          </a:prstGeom>
+          <a:noFill/>
+          <a:ln/>
+        </p:spPr>
+        <p:txBody>
+          <a:bodyPr wrap="square" rtlCol="0" anchor="ctr"/>
+          <a:lstStyle/>
+          <a:p>
+            <a:pPr indent="0" marL="0">
               <a:buNone/>
             </a:pPr>
             <a:r>
@@ -5275,19 +5275,19 @@
         <p:spPr>
           <a:xfrm>
             <a:off x="457200" y="6473952"/>
-            <a:ext cx="6400800" cy="274320"/>
-          </a:xfrm>
-          <a:prstGeom prst="rect">
-            <a:avLst/>
-          </a:prstGeom>
-          <a:noFill/>
-          <a:ln/>
-        </p:spPr>
-        <p:txBody>
-          <a:bodyPr wrap="square" rtlCol="0" anchor="ctr"/>
-          <a:lstStyle/>
-          <a:p>
-            <a:pPr algn="l" indent="0" marL="0">
+            <a:ext cx="7315200" cy="274320"/>
+          </a:xfrm>
+          <a:prstGeom prst="rect">
+            <a:avLst/>
+          </a:prstGeom>
+          <a:noFill/>
+          <a:ln/>
+        </p:spPr>
+        <p:txBody>
+          <a:bodyPr wrap="square" rtlCol="0" anchor="ctr"/>
+          <a:lstStyle/>
+          <a:p>
+            <a:pPr indent="0" marL="0">
               <a:buNone/>
             </a:pPr>
             <a:r>
@@ -5463,11 +5463,11 @@
         <p:spPr>
           <a:xfrm>
             <a:off x="457200" y="1600200"/>
-            <a:ext cx="2578608" cy="2080260"/>
+            <a:ext cx="2578608" cy="2034540"/>
           </a:xfrm>
           <a:prstGeom prst="roundRect">
             <a:avLst>
-              <a:gd name="adj" fmla="val 3077"/>
+              <a:gd name="adj" fmla="val 3146"/>
             </a:avLst>
           </a:prstGeom>
           <a:solidFill>
@@ -5528,7 +5528,7 @@
               <a:buNone/>
             </a:pPr>
             <a:r>
-              <a:rPr lang="en-US" sz="1500" b="1" dirty="0">
+              <a:rPr lang="en-US" sz="1450" b="1" dirty="0">
                 <a:solidFill>
                   <a:srgbClr val="263947"/>
                 </a:solidFill>
@@ -5538,7 +5538,7 @@
               </a:rPr>
               <a:t>Systolic array</a:t>
             </a:r>
-            <a:endParaRPr lang="en-US" sz="1500" dirty="0"/>
+            <a:endParaRPr lang="en-US" sz="1450" dirty="0"/>
           </a:p>
         </p:txBody>
       </p:sp>
@@ -5551,7 +5551,7 @@
         <p:spPr>
           <a:xfrm>
             <a:off x="676656" y="2377440"/>
-            <a:ext cx="2139696" cy="1165860"/>
+            <a:ext cx="2139696" cy="1120140"/>
           </a:xfrm>
           <a:prstGeom prst="rect">
             <a:avLst/>
@@ -5567,7 +5567,7 @@
               <a:buNone/>
             </a:pPr>
             <a:r>
-              <a:rPr lang="en-US" sz="1250" dirty="0">
+              <a:rPr lang="en-US" sz="1200" dirty="0">
                 <a:solidFill>
                   <a:srgbClr val="263947"/>
                 </a:solidFill>
@@ -5577,7 +5577,7 @@
               </a:rPr>
               <a:t>Reuse from geometry; data flows through a grid.</a:t>
             </a:r>
-            <a:endParaRPr lang="en-US" sz="1250" dirty="0"/>
+            <a:endParaRPr lang="en-US" sz="1200" dirty="0"/>
           </a:p>
         </p:txBody>
       </p:sp>
@@ -5590,11 +5590,11 @@
         <p:spPr>
           <a:xfrm>
             <a:off x="3355848" y="1600200"/>
-            <a:ext cx="2578608" cy="2080260"/>
+            <a:ext cx="2578608" cy="2034540"/>
           </a:xfrm>
           <a:prstGeom prst="roundRect">
             <a:avLst>
-              <a:gd name="adj" fmla="val 3077"/>
+              <a:gd name="adj" fmla="val 3146"/>
             </a:avLst>
           </a:prstGeom>
           <a:solidFill>
@@ -5655,7 +5655,7 @@
               <a:buNone/>
             </a:pPr>
             <a:r>
-              <a:rPr lang="en-US" sz="1500" b="1" dirty="0">
+              <a:rPr lang="en-US" sz="1450" b="1" dirty="0">
                 <a:solidFill>
                   <a:srgbClr val="263947"/>
                 </a:solidFill>
@@ -5665,7 +5665,7 @@
               </a:rPr>
               <a:t>Tensor processor</a:t>
             </a:r>
-            <a:endParaRPr lang="en-US" sz="1500" dirty="0"/>
+            <a:endParaRPr lang="en-US" sz="1450" dirty="0"/>
           </a:p>
         </p:txBody>
       </p:sp>
@@ -5678,7 +5678,7 @@
         <p:spPr>
           <a:xfrm>
             <a:off x="3575304" y="2377440"/>
-            <a:ext cx="2139696" cy="1165860"/>
+            <a:ext cx="2139696" cy="1120140"/>
           </a:xfrm>
           <a:prstGeom prst="rect">
             <a:avLst/>
@@ -5694,7 +5694,7 @@
               <a:buNone/>
             </a:pPr>
             <a:r>
-              <a:rPr lang="en-US" sz="1250" dirty="0">
+              <a:rPr lang="en-US" sz="1200" dirty="0">
                 <a:solidFill>
                   <a:srgbClr val="263947"/>
                 </a:solidFill>
@@ -5704,7 +5704,7 @@
               </a:rPr>
               <a:t>Compiler-owned; matrix engine + managed SRAM (TPU).</a:t>
             </a:r>
-            <a:endParaRPr lang="en-US" sz="1250" dirty="0"/>
+            <a:endParaRPr lang="en-US" sz="1200" dirty="0"/>
           </a:p>
         </p:txBody>
       </p:sp>
@@ -5717,11 +5717,11 @@
         <p:spPr>
           <a:xfrm>
             <a:off x="6254496" y="1600200"/>
-            <a:ext cx="2578608" cy="2080260"/>
+            <a:ext cx="2578608" cy="2034540"/>
           </a:xfrm>
           <a:prstGeom prst="roundRect">
             <a:avLst>
-              <a:gd name="adj" fmla="val 3077"/>
+              <a:gd name="adj" fmla="val 3146"/>
             </a:avLst>
           </a:prstGeom>
           <a:solidFill>
@@ -5782,7 +5782,7 @@
               <a:buNone/>
             </a:pPr>
             <a:r>
-              <a:rPr lang="en-US" sz="1500" b="1" dirty="0">
+              <a:rPr lang="en-US" sz="1450" b="1" dirty="0">
                 <a:solidFill>
                   <a:srgbClr val="263947"/>
                 </a:solidFill>
@@ -5792,7 +5792,7 @@
               </a:rPr>
               <a:t>Dataflow / tile</a:t>
             </a:r>
-            <a:endParaRPr lang="en-US" sz="1500" dirty="0"/>
+            <a:endParaRPr lang="en-US" sz="1450" dirty="0"/>
           </a:p>
         </p:txBody>
       </p:sp>
@@ -5805,7 +5805,7 @@
         <p:spPr>
           <a:xfrm>
             <a:off x="6473952" y="2377440"/>
-            <a:ext cx="2139696" cy="1165860"/>
+            <a:ext cx="2139696" cy="1120140"/>
           </a:xfrm>
           <a:prstGeom prst="rect">
             <a:avLst/>
@@ -5821,7 +5821,7 @@
               <a:buNone/>
             </a:pPr>
             <a:r>
-              <a:rPr lang="en-US" sz="1250" dirty="0">
+              <a:rPr lang="en-US" sz="1200" dirty="0">
                 <a:solidFill>
                   <a:srgbClr val="263947"/>
                 </a:solidFill>
@@ -5831,7 +5831,7 @@
               </a:rPr>
               <a:t>Static schedule; deterministic, low-latency (Groq).</a:t>
             </a:r>
-            <a:endParaRPr lang="en-US" sz="1250" dirty="0"/>
+            <a:endParaRPr lang="en-US" sz="1200" dirty="0"/>
           </a:p>
         </p:txBody>
       </p:sp>
@@ -5844,11 +5844,11 @@
         <p:spPr>
           <a:xfrm>
             <a:off x="9153144" y="1600200"/>
-            <a:ext cx="2578608" cy="2080260"/>
+            <a:ext cx="2578608" cy="2034540"/>
           </a:xfrm>
           <a:prstGeom prst="roundRect">
             <a:avLst>
-              <a:gd name="adj" fmla="val 3077"/>
+              <a:gd name="adj" fmla="val 3146"/>
             </a:avLst>
           </a:prstGeom>
           <a:solidFill>
@@ -5909,7 +5909,7 @@
               <a:buNone/>
             </a:pPr>
             <a:r>
-              <a:rPr lang="en-US" sz="1500" b="1" dirty="0">
+              <a:rPr lang="en-US" sz="1450" b="1" dirty="0">
                 <a:solidFill>
                   <a:srgbClr val="263947"/>
                 </a:solidFill>
@@ -5919,7 +5919,7 @@
               </a:rPr>
               <a:t>NPU / near-sensor</a:t>
             </a:r>
-            <a:endParaRPr lang="en-US" sz="1500" dirty="0"/>
+            <a:endParaRPr lang="en-US" sz="1450" dirty="0"/>
           </a:p>
         </p:txBody>
       </p:sp>
@@ -5932,7 +5932,7 @@
         <p:spPr>
           <a:xfrm>
             <a:off x="9372600" y="2377440"/>
-            <a:ext cx="2139696" cy="1165860"/>
+            <a:ext cx="2139696" cy="1120140"/>
           </a:xfrm>
           <a:prstGeom prst="rect">
             <a:avLst/>
@@ -5948,7 +5948,7 @@
               <a:buNone/>
             </a:pPr>
             <a:r>
-              <a:rPr lang="en-US" sz="1250" dirty="0">
+              <a:rPr lang="en-US" sz="1200" dirty="0">
                 <a:solidFill>
                   <a:srgbClr val="263947"/>
                 </a:solidFill>
@@ -5958,7 +5958,7 @@
               </a:rPr>
               <a:t>Power-domain-first; wake-scope energy (mobile, µNPU).</a:t>
             </a:r>
-            <a:endParaRPr lang="en-US" sz="1250" dirty="0"/>
+            <a:endParaRPr lang="en-US" sz="1200" dirty="0"/>
           </a:p>
         </p:txBody>
       </p:sp>
@@ -5970,12 +5970,12 @@
         </p:nvSpPr>
         <p:spPr>
           <a:xfrm>
-            <a:off x="457200" y="3954780"/>
-            <a:ext cx="2578608" cy="2080260"/>
+            <a:off x="457200" y="3909060"/>
+            <a:ext cx="2578608" cy="2034540"/>
           </a:xfrm>
           <a:prstGeom prst="roundRect">
             <a:avLst>
-              <a:gd name="adj" fmla="val 3077"/>
+              <a:gd name="adj" fmla="val 3146"/>
             </a:avLst>
           </a:prstGeom>
           <a:solidFill>
@@ -5997,7 +5997,7 @@
         </p:nvSpPr>
         <p:spPr>
           <a:xfrm>
-            <a:off x="658368" y="4155948"/>
+            <a:off x="658368" y="4110228"/>
             <a:ext cx="457200" cy="457200"/>
           </a:xfrm>
           <a:prstGeom prst="roundRect">
@@ -6019,7 +6019,7 @@
         </p:nvSpPr>
         <p:spPr>
           <a:xfrm>
-            <a:off x="1234440" y="4137660"/>
+            <a:off x="1234440" y="4091940"/>
             <a:ext cx="1618488" cy="502920"/>
           </a:xfrm>
           <a:prstGeom prst="rect">
@@ -6036,7 +6036,7 @@
               <a:buNone/>
             </a:pPr>
             <a:r>
-              <a:rPr lang="en-US" sz="1500" b="1" dirty="0">
+              <a:rPr lang="en-US" sz="1450" b="1" dirty="0">
                 <a:solidFill>
                   <a:srgbClr val="263947"/>
                 </a:solidFill>
@@ -6046,7 +6046,7 @@
               </a:rPr>
               <a:t>FPGA / reconfigurable</a:t>
             </a:r>
-            <a:endParaRPr lang="en-US" sz="1500" dirty="0"/>
+            <a:endParaRPr lang="en-US" sz="1450" dirty="0"/>
           </a:p>
         </p:txBody>
       </p:sp>
@@ -6058,8 +6058,8 @@
         </p:nvSpPr>
         <p:spPr>
           <a:xfrm>
-            <a:off x="676656" y="4732020"/>
-            <a:ext cx="2139696" cy="1165860"/>
+            <a:off x="676656" y="4686300"/>
+            <a:ext cx="2139696" cy="1120140"/>
           </a:xfrm>
           <a:prstGeom prst="rect">
             <a:avLst/>
@@ -6075,7 +6075,7 @@
               <a:buNone/>
             </a:pPr>
             <a:r>
-              <a:rPr lang="en-US" sz="1250" dirty="0">
+              <a:rPr lang="en-US" sz="1200" dirty="0">
                 <a:solidFill>
                   <a:srgbClr val="263947"/>
                 </a:solidFill>
@@ -6085,7 +6085,7 @@
               </a:rPr>
               <a:t>Structure set after manufacturing; flexibility.</a:t>
             </a:r>
-            <a:endParaRPr lang="en-US" sz="1250" dirty="0"/>
+            <a:endParaRPr lang="en-US" sz="1200" dirty="0"/>
           </a:p>
         </p:txBody>
       </p:sp>
@@ -6097,12 +6097,12 @@
         </p:nvSpPr>
         <p:spPr>
           <a:xfrm>
-            <a:off x="3355848" y="3954780"/>
-            <a:ext cx="2578608" cy="2080260"/>
+            <a:off x="3355848" y="3909060"/>
+            <a:ext cx="2578608" cy="2034540"/>
           </a:xfrm>
           <a:prstGeom prst="roundRect">
             <a:avLst>
-              <a:gd name="adj" fmla="val 3077"/>
+              <a:gd name="adj" fmla="val 3146"/>
             </a:avLst>
           </a:prstGeom>
           <a:solidFill>
@@ -6124,7 +6124,7 @@
         </p:nvSpPr>
         <p:spPr>
           <a:xfrm>
-            <a:off x="3557016" y="4155948"/>
+            <a:off x="3557016" y="4110228"/>
             <a:ext cx="457200" cy="457200"/>
           </a:xfrm>
           <a:prstGeom prst="roundRect">
@@ -6146,7 +6146,7 @@
         </p:nvSpPr>
         <p:spPr>
           <a:xfrm>
-            <a:off x="4133088" y="4137660"/>
+            <a:off x="4133088" y="4091940"/>
             <a:ext cx="1618488" cy="502920"/>
           </a:xfrm>
           <a:prstGeom prst="rect">
@@ -6163,7 +6163,7 @@
               <a:buNone/>
             </a:pPr>
             <a:r>
-              <a:rPr lang="en-US" sz="1500" b="1" dirty="0">
+              <a:rPr lang="en-US" sz="1450" b="1" dirty="0">
                 <a:solidFill>
                   <a:srgbClr val="263947"/>
                 </a:solidFill>
@@ -6173,7 +6173,7 @@
               </a:rPr>
               <a:t>Wafer-scale</a:t>
             </a:r>
-            <a:endParaRPr lang="en-US" sz="1500" dirty="0"/>
+            <a:endParaRPr lang="en-US" sz="1450" dirty="0"/>
           </a:p>
         </p:txBody>
       </p:sp>
@@ -6185,8 +6185,8 @@
         </p:nvSpPr>
         <p:spPr>
           <a:xfrm>
-            <a:off x="3575304" y="4732020"/>
-            <a:ext cx="2139696" cy="1165860"/>
+            <a:off x="3575304" y="4686300"/>
+            <a:ext cx="2139696" cy="1120140"/>
           </a:xfrm>
           <a:prstGeom prst="rect">
             <a:avLst/>
@@ -6202,7 +6202,7 @@
               <a:buNone/>
             </a:pPr>
             <a:r>
-              <a:rPr lang="en-US" sz="1250" dirty="0">
+              <a:rPr lang="en-US" sz="1200" dirty="0">
                 <a:solidFill>
                   <a:srgbClr val="263947"/>
                 </a:solidFill>
@@ -6212,7 +6212,7 @@
               </a:rPr>
               <a:t>Whole wafer; inter-chip comms become on-wafer.</a:t>
             </a:r>
-            <a:endParaRPr lang="en-US" sz="1250" dirty="0"/>
+            <a:endParaRPr lang="en-US" sz="1200" dirty="0"/>
           </a:p>
         </p:txBody>
       </p:sp>
@@ -6224,12 +6224,12 @@
         </p:nvSpPr>
         <p:spPr>
           <a:xfrm>
-            <a:off x="6254496" y="3954780"/>
-            <a:ext cx="2578608" cy="2080260"/>
+            <a:off x="6254496" y="3909060"/>
+            <a:ext cx="2578608" cy="2034540"/>
           </a:xfrm>
           <a:prstGeom prst="roundRect">
             <a:avLst>
-              <a:gd name="adj" fmla="val 3077"/>
+              <a:gd name="adj" fmla="val 3146"/>
             </a:avLst>
           </a:prstGeom>
           <a:solidFill>
@@ -6251,7 +6251,7 @@
         </p:nvSpPr>
         <p:spPr>
           <a:xfrm>
-            <a:off x="6455664" y="4155948"/>
+            <a:off x="6455664" y="4110228"/>
             <a:ext cx="457200" cy="457200"/>
           </a:xfrm>
           <a:prstGeom prst="roundRect">
@@ -6273,7 +6273,7 @@
         </p:nvSpPr>
         <p:spPr>
           <a:xfrm>
-            <a:off x="7031736" y="4137660"/>
+            <a:off x="7031736" y="4091940"/>
             <a:ext cx="1618488" cy="502920"/>
           </a:xfrm>
           <a:prstGeom prst="rect">
@@ -6290,7 +6290,7 @@
               <a:buNone/>
             </a:pPr>
             <a:r>
-              <a:rPr lang="en-US" sz="1500" b="1" dirty="0">
+              <a:rPr lang="en-US" sz="1450" b="1" dirty="0">
                 <a:solidFill>
                   <a:srgbClr val="263947"/>
                 </a:solidFill>
@@ -6300,7 +6300,7 @@
               </a:rPr>
               <a:t>Memory-centric / PIM</a:t>
             </a:r>
-            <a:endParaRPr lang="en-US" sz="1500" dirty="0"/>
+            <a:endParaRPr lang="en-US" sz="1450" dirty="0"/>
           </a:p>
         </p:txBody>
       </p:sp>
@@ -6312,8 +6312,8 @@
         </p:nvSpPr>
         <p:spPr>
           <a:xfrm>
-            <a:off x="6473952" y="4732020"/>
-            <a:ext cx="2139696" cy="1165860"/>
+            <a:off x="6473952" y="4686300"/>
+            <a:ext cx="2139696" cy="1120140"/>
           </a:xfrm>
           <a:prstGeom prst="rect">
             <a:avLst/>
@@ -6329,7 +6329,7 @@
               <a:buNone/>
             </a:pPr>
             <a:r>
-              <a:rPr lang="en-US" sz="1250" dirty="0">
+              <a:rPr lang="en-US" sz="1200" dirty="0">
                 <a:solidFill>
                   <a:srgbClr val="263947"/>
                 </a:solidFill>
@@ -6339,7 +6339,7 @@
               </a:rPr>
               <a:t>Compute moves to the data; interface carries results.</a:t>
             </a:r>
-            <a:endParaRPr lang="en-US" sz="1250" dirty="0"/>
+            <a:endParaRPr lang="en-US" sz="1200" dirty="0"/>
           </a:p>
         </p:txBody>
       </p:sp>
@@ -6351,12 +6351,12 @@
         </p:nvSpPr>
         <p:spPr>
           <a:xfrm>
-            <a:off x="9153144" y="3954780"/>
-            <a:ext cx="2578608" cy="2080260"/>
+            <a:off x="9153144" y="3909060"/>
+            <a:ext cx="2578608" cy="2034540"/>
           </a:xfrm>
           <a:prstGeom prst="roundRect">
             <a:avLst>
-              <a:gd name="adj" fmla="val 3077"/>
+              <a:gd name="adj" fmla="val 3146"/>
             </a:avLst>
           </a:prstGeom>
           <a:solidFill>
@@ -6378,7 +6378,7 @@
         </p:nvSpPr>
         <p:spPr>
           <a:xfrm>
-            <a:off x="9354312" y="4155948"/>
+            <a:off x="9354312" y="4110228"/>
             <a:ext cx="457200" cy="457200"/>
           </a:xfrm>
           <a:prstGeom prst="roundRect">
@@ -6400,7 +6400,7 @@
         </p:nvSpPr>
         <p:spPr>
           <a:xfrm>
-            <a:off x="9930384" y="4137660"/>
+            <a:off x="9930384" y="4091940"/>
             <a:ext cx="1618488" cy="502920"/>
           </a:xfrm>
           <a:prstGeom prst="rect">
@@ -6417,7 +6417,7 @@
               <a:buNone/>
             </a:pPr>
             <a:r>
-              <a:rPr lang="en-US" sz="1500" b="1" dirty="0">
+              <a:rPr lang="en-US" sz="1450" b="1" dirty="0">
                 <a:solidFill>
                   <a:srgbClr val="263947"/>
                 </a:solidFill>
@@ -6427,7 +6427,7 @@
               </a:rPr>
               <a:t>Neuromorphic</a:t>
             </a:r>
-            <a:endParaRPr lang="en-US" sz="1500" dirty="0"/>
+            <a:endParaRPr lang="en-US" sz="1450" dirty="0"/>
           </a:p>
         </p:txBody>
       </p:sp>
@@ -6439,8 +6439,8 @@
         </p:nvSpPr>
         <p:spPr>
           <a:xfrm>
-            <a:off x="9372600" y="4732020"/>
-            <a:ext cx="2139696" cy="1165860"/>
+            <a:off x="9372600" y="4686300"/>
+            <a:ext cx="2139696" cy="1120140"/>
           </a:xfrm>
           <a:prstGeom prst="rect">
             <a:avLst/>
@@ -6456,7 +6456,7 @@
               <a:buNone/>
             </a:pPr>
             <a:r>
-              <a:rPr lang="en-US" sz="1250" dirty="0">
+              <a:rPr lang="en-US" sz="1200" dirty="0">
                 <a:solidFill>
                   <a:srgbClr val="263947"/>
                 </a:solidFill>
@@ -6466,7 +6466,7 @@
               </a:rPr>
               <a:t>Event-driven; energy ∝ activity (forward-looking).</a:t>
             </a:r>
-            <a:endParaRPr lang="en-US" sz="1250" dirty="0"/>
+            <a:endParaRPr lang="en-US" sz="1200" dirty="0"/>
           </a:p>
         </p:txBody>
       </p:sp>
@@ -6478,7 +6478,7 @@
         </p:nvSpPr>
         <p:spPr>
           <a:xfrm>
-            <a:off x="457200" y="6080760"/>
+            <a:off x="457200" y="6108192"/>
             <a:ext cx="11274552" cy="365760"/>
           </a:xfrm>
           <a:prstGeom prst="rect">
@@ -6532,19 +6532,19 @@
         <p:spPr>
           <a:xfrm>
             <a:off x="457200" y="6473952"/>
-            <a:ext cx="6400800" cy="274320"/>
-          </a:xfrm>
-          <a:prstGeom prst="rect">
-            <a:avLst/>
-          </a:prstGeom>
-          <a:noFill/>
-          <a:ln/>
-        </p:spPr>
-        <p:txBody>
-          <a:bodyPr wrap="square" rtlCol="0" anchor="ctr"/>
-          <a:lstStyle/>
-          <a:p>
-            <a:pPr algn="l" indent="0" marL="0">
+            <a:ext cx="7315200" cy="274320"/>
+          </a:xfrm>
+          <a:prstGeom prst="rect">
+            <a:avLst/>
+          </a:prstGeom>
+          <a:noFill/>
+          <a:ln/>
+        </p:spPr>
+        <p:txBody>
+          <a:bodyPr wrap="square" rtlCol="0" anchor="ctr"/>
+          <a:lstStyle/>
+          <a:p>
+            <a:pPr indent="0" marL="0">
               <a:buNone/>
             </a:pPr>
             <a:r>
@@ -6705,7 +6705,7 @@
                 <a:ea typeface="Cambria" pitchFamily="34" charset="-122"/>
                 <a:cs typeface="Cambria" pitchFamily="34" charset="-120"/>
               </a:rPr>
-              <a:t>NPUs own the client and edge</a:t>
+              <a:t>NPUs are the client's standard low-power AI block</a:t>
             </a:r>
             <a:endParaRPr lang="en-US" sz="3000" dirty="0"/>
           </a:p>
@@ -6742,7 +6742,7 @@
         </p:nvSpPr>
         <p:spPr>
           <a:xfrm>
-            <a:off x="8138160" y="1801368"/>
+            <a:off x="8138160" y="1847088"/>
             <a:ext cx="109728" cy="109728"/>
           </a:xfrm>
           <a:prstGeom prst="rect">
@@ -6762,8 +6762,8 @@
         </p:nvSpPr>
         <p:spPr>
           <a:xfrm>
-            <a:off x="8366760" y="1627632"/>
-            <a:ext cx="3291840" cy="640080"/>
+            <a:off x="8366760" y="1673352"/>
+            <a:ext cx="3291840" cy="731520"/>
           </a:xfrm>
           <a:prstGeom prst="rect">
             <a:avLst/>
@@ -6779,7 +6779,7 @@
               <a:buNone/>
             </a:pPr>
             <a:r>
-              <a:rPr lang="en-US" sz="1350" dirty="0">
+              <a:rPr lang="en-US" sz="1300" dirty="0">
                 <a:solidFill>
                   <a:srgbClr val="263947"/>
                 </a:solidFill>
@@ -6787,9 +6787,9 @@
                 <a:ea typeface="Calibri" pitchFamily="34" charset="-122"/>
                 <a:cs typeface="Calibri" pitchFamily="34" charset="-120"/>
               </a:rPr>
-              <a:t>Value = energy + wake scope.</a:t>
-            </a:r>
-            <a:endParaRPr lang="en-US" sz="1350" dirty="0"/>
+              <a:t>Universal in client SoCs (≥40 TOPS floor).</a:t>
+            </a:r>
+            <a:endParaRPr lang="en-US" sz="1300" dirty="0"/>
           </a:p>
         </p:txBody>
       </p:sp>
@@ -6801,7 +6801,7 @@
         </p:nvSpPr>
         <p:spPr>
           <a:xfrm>
-            <a:off x="8138160" y="2551176"/>
+            <a:off x="8138160" y="2596896"/>
             <a:ext cx="109728" cy="109728"/>
           </a:xfrm>
           <a:prstGeom prst="rect">
@@ -6821,8 +6821,8 @@
         </p:nvSpPr>
         <p:spPr>
           <a:xfrm>
-            <a:off x="8366760" y="2377440"/>
-            <a:ext cx="3291840" cy="640080"/>
+            <a:off x="8366760" y="2423160"/>
+            <a:ext cx="3291840" cy="731520"/>
           </a:xfrm>
           <a:prstGeom prst="rect">
             <a:avLst/>
@@ -6838,7 +6838,7 @@
               <a:buNone/>
             </a:pPr>
             <a:r>
-              <a:rPr lang="en-US" sz="1350" dirty="0">
+              <a:rPr lang="en-US" sz="1300" dirty="0">
                 <a:solidFill>
                   <a:srgbClr val="263947"/>
                 </a:solidFill>
@@ -6846,9 +6846,9 @@
                 <a:ea typeface="Calibri" pitchFamily="34" charset="-122"/>
                 <a:cs typeface="Calibri" pitchFamily="34" charset="-120"/>
               </a:rPr>
-              <a:t>Coverage, not TOPS, decides.</a:t>
-            </a:r>
-            <a:endParaRPr lang="en-US" sz="1350" dirty="0"/>
+              <a:t>Built for sustained / ambient work — not peak.</a:t>
+            </a:r>
+            <a:endParaRPr lang="en-US" sz="1300" dirty="0"/>
           </a:p>
         </p:txBody>
       </p:sp>
@@ -6860,7 +6860,7 @@
         </p:nvSpPr>
         <p:spPr>
           <a:xfrm>
-            <a:off x="8138160" y="3300984"/>
+            <a:off x="8138160" y="3346704"/>
             <a:ext cx="109728" cy="109728"/>
           </a:xfrm>
           <a:prstGeom prst="rect">
@@ -6880,8 +6880,8 @@
         </p:nvSpPr>
         <p:spPr>
           <a:xfrm>
-            <a:off x="8366760" y="3127248"/>
-            <a:ext cx="3291840" cy="640080"/>
+            <a:off x="8366760" y="3172968"/>
+            <a:ext cx="3291840" cy="731520"/>
           </a:xfrm>
           <a:prstGeom prst="rect">
             <a:avLst/>
@@ -6897,7 +6897,7 @@
               <a:buNone/>
             </a:pPr>
             <a:r>
-              <a:rPr lang="en-US" sz="1350" dirty="0">
+              <a:rPr lang="en-US" sz="1300" dirty="0">
                 <a:solidFill>
                   <a:srgbClr val="263947"/>
                 </a:solidFill>
@@ -6905,15 +6905,74 @@
                 <a:ea typeface="Calibri" pitchFamily="34" charset="-122"/>
                 <a:cs typeface="Calibri" pitchFamily="34" charset="-120"/>
               </a:rPr>
-              <a:t>Fallback behavior is everything.</a:t>
-            </a:r>
-            <a:endParaRPr lang="en-US" sz="1350" dirty="0"/>
+              <a:t>Heavy generative inference still runs on the GPU.</a:t>
+            </a:r>
+            <a:endParaRPr lang="en-US" sz="1300" dirty="0"/>
           </a:p>
         </p:txBody>
       </p:sp>
       <p:sp>
         <p:nvSpPr>
           <p:cNvPr id="11" name="Shape 8"/>
+          <p:cNvSpPr/>
+          <p:nvPr/>
+        </p:nvSpPr>
+        <p:spPr>
+          <a:xfrm>
+            <a:off x="8138160" y="4096512"/>
+            <a:ext cx="109728" cy="109728"/>
+          </a:xfrm>
+          <a:prstGeom prst="rect">
+            <a:avLst/>
+          </a:prstGeom>
+          <a:solidFill>
+            <a:srgbClr val="E08A2B"/>
+          </a:solidFill>
+          <a:ln/>
+        </p:spPr>
+      </p:sp>
+      <p:sp>
+        <p:nvSpPr>
+          <p:cNvPr id="12" name="Text 9"/>
+          <p:cNvSpPr/>
+          <p:nvPr/>
+        </p:nvSpPr>
+        <p:spPr>
+          <a:xfrm>
+            <a:off x="8366760" y="3922776"/>
+            <a:ext cx="3291840" cy="731520"/>
+          </a:xfrm>
+          <a:prstGeom prst="rect">
+            <a:avLst/>
+          </a:prstGeom>
+          <a:noFill/>
+          <a:ln/>
+        </p:spPr>
+        <p:txBody>
+          <a:bodyPr wrap="square" rtlCol="0" anchor="t"/>
+          <a:lstStyle/>
+          <a:p>
+            <a:pPr indent="0" marL="0">
+              <a:buNone/>
+            </a:pPr>
+            <a:r>
+              <a:rPr lang="en-US" sz="1300" dirty="0">
+                <a:solidFill>
+                  <a:srgbClr val="263947"/>
+                </a:solidFill>
+                <a:latin typeface="Calibri" pitchFamily="34" charset="0"/>
+                <a:ea typeface="Calibri" pitchFamily="34" charset="-122"/>
+                <a:cs typeface="Calibri" pitchFamily="34" charset="-120"/>
+              </a:rPr>
+              <a:t>Coverage, not TOPS, decides real value.</a:t>
+            </a:r>
+            <a:endParaRPr lang="en-US" sz="1300" dirty="0"/>
+          </a:p>
+        </p:txBody>
+      </p:sp>
+      <p:sp>
+        <p:nvSpPr>
+          <p:cNvPr id="13" name="Shape 10"/>
           <p:cNvSpPr/>
           <p:nvPr/>
         </p:nvSpPr>
@@ -6940,7 +6999,7 @@
       </p:sp>
       <p:sp>
         <p:nvSpPr>
-          <p:cNvPr id="12" name="Text 9"/>
+          <p:cNvPr id="14" name="Text 11"/>
           <p:cNvSpPr/>
           <p:nvPr/>
         </p:nvSpPr>
@@ -6985,7 +7044,7 @@
                 <a:ea typeface="Calibri" pitchFamily="34" charset="-122"/>
                 <a:cs typeface="Calibri" pitchFamily="34" charset="-120"/>
               </a:rPr>
-              <a:t>Wake-scope energy and per-unit cost floors are structurally outside the GPU contract.</a:t>
+              <a:t>Structural claim: wake-scope energy + cost floors sit outside the GPU contract, so the edge is where specialization is safest — not that NPUs win the client outright.</a:t>
             </a:r>
             <a:endParaRPr lang="en-US" sz="1400" dirty="0"/>
           </a:p>
@@ -6993,26 +7052,26 @@
       </p:sp>
       <p:sp>
         <p:nvSpPr>
-          <p:cNvPr id="13" name="Text 10"/>
+          <p:cNvPr id="15" name="Text 12"/>
           <p:cNvSpPr/>
           <p:nvPr/>
         </p:nvSpPr>
         <p:spPr>
           <a:xfrm>
             <a:off x="457200" y="6473952"/>
-            <a:ext cx="6400800" cy="274320"/>
-          </a:xfrm>
-          <a:prstGeom prst="rect">
-            <a:avLst/>
-          </a:prstGeom>
-          <a:noFill/>
-          <a:ln/>
-        </p:spPr>
-        <p:txBody>
-          <a:bodyPr wrap="square" rtlCol="0" anchor="ctr"/>
-          <a:lstStyle/>
-          <a:p>
-            <a:pPr algn="l" indent="0" marL="0">
+            <a:ext cx="7315200" cy="274320"/>
+          </a:xfrm>
+          <a:prstGeom prst="rect">
+            <a:avLst/>
+          </a:prstGeom>
+          <a:noFill/>
+          <a:ln/>
+        </p:spPr>
+        <p:txBody>
+          <a:bodyPr wrap="square" rtlCol="0" anchor="ctr"/>
+          <a:lstStyle/>
+          <a:p>
+            <a:pPr indent="0" marL="0">
               <a:buNone/>
             </a:pPr>
             <a:r>
@@ -7032,7 +7091,7 @@
       </p:sp>
       <p:sp>
         <p:nvSpPr>
-          <p:cNvPr id="14" name="Text 11"/>
+          <p:cNvPr id="16" name="Text 13"/>
           <p:cNvSpPr/>
           <p:nvPr/>
         </p:nvSpPr>
@@ -7291,19 +7350,19 @@
         <p:spPr>
           <a:xfrm>
             <a:off x="457200" y="6473952"/>
-            <a:ext cx="6400800" cy="274320"/>
-          </a:xfrm>
-          <a:prstGeom prst="rect">
-            <a:avLst/>
-          </a:prstGeom>
-          <a:noFill/>
-          <a:ln/>
-        </p:spPr>
-        <p:txBody>
-          <a:bodyPr wrap="square" rtlCol="0" anchor="ctr"/>
-          <a:lstStyle/>
-          <a:p>
-            <a:pPr algn="l" indent="0" marL="0">
+            <a:ext cx="7315200" cy="274320"/>
+          </a:xfrm>
+          <a:prstGeom prst="rect">
+            <a:avLst/>
+          </a:prstGeom>
+          <a:noFill/>
+          <a:ln/>
+        </p:spPr>
+        <p:txBody>
+          <a:bodyPr wrap="square" rtlCol="0" anchor="ctr"/>
+          <a:lstStyle/>
+          <a:p>
+            <a:pPr indent="0" marL="0">
               <a:buNone/>
             </a:pPr>
             <a:r>
@@ -7582,19 +7641,19 @@
         <p:spPr>
           <a:xfrm>
             <a:off x="457200" y="6473952"/>
-            <a:ext cx="6400800" cy="274320"/>
-          </a:xfrm>
-          <a:prstGeom prst="rect">
-            <a:avLst/>
-          </a:prstGeom>
-          <a:noFill/>
-          <a:ln/>
-        </p:spPr>
-        <p:txBody>
-          <a:bodyPr wrap="square" rtlCol="0" anchor="ctr"/>
-          <a:lstStyle/>
-          <a:p>
-            <a:pPr algn="l" indent="0" marL="0">
+            <a:ext cx="7315200" cy="274320"/>
+          </a:xfrm>
+          <a:prstGeom prst="rect">
+            <a:avLst/>
+          </a:prstGeom>
+          <a:noFill/>
+          <a:ln/>
+        </p:spPr>
+        <p:txBody>
+          <a:bodyPr wrap="square" rtlCol="0" anchor="ctr"/>
+          <a:lstStyle/>
+          <a:p>
+            <a:pPr indent="0" marL="0">
               <a:buNone/>
             </a:pPr>
             <a:r>
@@ -7770,11 +7829,11 @@
         <p:spPr>
           <a:xfrm>
             <a:off x="457200" y="1600200"/>
-            <a:ext cx="3544824" cy="2080260"/>
+            <a:ext cx="3544824" cy="2034540"/>
           </a:xfrm>
           <a:prstGeom prst="roundRect">
             <a:avLst>
-              <a:gd name="adj" fmla="val 3077"/>
+              <a:gd name="adj" fmla="val 3146"/>
             </a:avLst>
           </a:prstGeom>
           <a:solidFill>
@@ -7874,7 +7933,7 @@
               <a:buNone/>
             </a:pPr>
             <a:r>
-              <a:rPr lang="en-US" sz="1500" b="1" dirty="0">
+              <a:rPr lang="en-US" sz="1450" b="1" dirty="0">
                 <a:solidFill>
                   <a:srgbClr val="263947"/>
                 </a:solidFill>
@@ -7884,7 +7943,7 @@
               </a:rPr>
               <a:t>The driving factors</a:t>
             </a:r>
-            <a:endParaRPr lang="en-US" sz="1500" dirty="0"/>
+            <a:endParaRPr lang="en-US" sz="1450" dirty="0"/>
           </a:p>
         </p:txBody>
       </p:sp>
@@ -7897,7 +7956,7 @@
         <p:spPr>
           <a:xfrm>
             <a:off x="676656" y="2377440"/>
-            <a:ext cx="3105912" cy="1165860"/>
+            <a:ext cx="3105912" cy="1120140"/>
           </a:xfrm>
           <a:prstGeom prst="rect">
             <a:avLst/>
@@ -7913,7 +7972,7 @@
               <a:buNone/>
             </a:pPr>
             <a:r>
-              <a:rPr lang="en-US" sz="1250" dirty="0">
+              <a:rPr lang="en-US" sz="1200" dirty="0">
                 <a:solidFill>
                   <a:srgbClr val="263947"/>
                 </a:solidFill>
@@ -7923,7 +7982,7 @@
               </a:rPr>
               <a:t>The physical pressures that push work off the GPU: data movement, memory bandwidth, energy, determinism.</a:t>
             </a:r>
-            <a:endParaRPr lang="en-US" sz="1250" dirty="0"/>
+            <a:endParaRPr lang="en-US" sz="1200" dirty="0"/>
           </a:p>
         </p:txBody>
       </p:sp>
@@ -7936,11 +7995,11 @@
         <p:spPr>
           <a:xfrm>
             <a:off x="4322064" y="1600200"/>
-            <a:ext cx="3544824" cy="2080260"/>
+            <a:ext cx="3544824" cy="2034540"/>
           </a:xfrm>
           <a:prstGeom prst="roundRect">
             <a:avLst>
-              <a:gd name="adj" fmla="val 3077"/>
+              <a:gd name="adj" fmla="val 3146"/>
             </a:avLst>
           </a:prstGeom>
           <a:solidFill>
@@ -8040,7 +8099,7 @@
               <a:buNone/>
             </a:pPr>
             <a:r>
-              <a:rPr lang="en-US" sz="1500" b="1" dirty="0">
+              <a:rPr lang="en-US" sz="1450" b="1" dirty="0">
                 <a:solidFill>
                   <a:srgbClr val="263947"/>
                 </a:solidFill>
@@ -8050,7 +8109,7 @@
               </a:rPr>
               <a:t>The decision framework</a:t>
             </a:r>
-            <a:endParaRPr lang="en-US" sz="1500" dirty="0"/>
+            <a:endParaRPr lang="en-US" sz="1450" dirty="0"/>
           </a:p>
         </p:txBody>
       </p:sp>
@@ -8063,7 +8122,7 @@
         <p:spPr>
           <a:xfrm>
             <a:off x="4541520" y="2377440"/>
-            <a:ext cx="3105912" cy="1165860"/>
+            <a:ext cx="3105912" cy="1120140"/>
           </a:xfrm>
           <a:prstGeom prst="rect">
             <a:avLst/>
@@ -8079,7 +8138,7 @@
               <a:buNone/>
             </a:pPr>
             <a:r>
-              <a:rPr lang="en-US" sz="1250" dirty="0">
+              <a:rPr lang="en-US" sz="1200" dirty="0">
                 <a:solidFill>
                   <a:srgbClr val="263947"/>
                 </a:solidFill>
@@ -8089,7 +8148,7 @@
               </a:rPr>
               <a:t>Six architectural contracts and a four-condition test for when specialization is actually justified.</a:t>
             </a:r>
-            <a:endParaRPr lang="en-US" sz="1250" dirty="0"/>
+            <a:endParaRPr lang="en-US" sz="1200" dirty="0"/>
           </a:p>
         </p:txBody>
       </p:sp>
@@ -8102,11 +8161,11 @@
         <p:spPr>
           <a:xfrm>
             <a:off x="8186928" y="1600200"/>
-            <a:ext cx="3544824" cy="2080260"/>
+            <a:ext cx="3544824" cy="2034540"/>
           </a:xfrm>
           <a:prstGeom prst="roundRect">
             <a:avLst>
-              <a:gd name="adj" fmla="val 3077"/>
+              <a:gd name="adj" fmla="val 3146"/>
             </a:avLst>
           </a:prstGeom>
           <a:solidFill>
@@ -8206,7 +8265,7 @@
               <a:buNone/>
             </a:pPr>
             <a:r>
-              <a:rPr lang="en-US" sz="1500" b="1" dirty="0">
+              <a:rPr lang="en-US" sz="1450" b="1" dirty="0">
                 <a:solidFill>
                   <a:srgbClr val="263947"/>
                 </a:solidFill>
@@ -8216,7 +8275,7 @@
               </a:rPr>
               <a:t>The families</a:t>
             </a:r>
-            <a:endParaRPr lang="en-US" sz="1500" dirty="0"/>
+            <a:endParaRPr lang="en-US" sz="1450" dirty="0"/>
           </a:p>
         </p:txBody>
       </p:sp>
@@ -8229,7 +8288,7 @@
         <p:spPr>
           <a:xfrm>
             <a:off x="8406384" y="2377440"/>
-            <a:ext cx="3105912" cy="1165860"/>
+            <a:ext cx="3105912" cy="1120140"/>
           </a:xfrm>
           <a:prstGeom prst="rect">
             <a:avLst/>
@@ -8245,7 +8304,7 @@
               <a:buNone/>
             </a:pPr>
             <a:r>
-              <a:rPr lang="en-US" sz="1250" dirty="0">
+              <a:rPr lang="en-US" sz="1200" dirty="0">
                 <a:solidFill>
                   <a:srgbClr val="263947"/>
                 </a:solidFill>
@@ -8255,7 +8314,7 @@
               </a:rPr>
               <a:t>How beyond-GPU accelerators group by which contract they change — not by vendor.</a:t>
             </a:r>
-            <a:endParaRPr lang="en-US" sz="1250" dirty="0"/>
+            <a:endParaRPr lang="en-US" sz="1200" dirty="0"/>
           </a:p>
         </p:txBody>
       </p:sp>
@@ -8267,12 +8326,12 @@
         </p:nvSpPr>
         <p:spPr>
           <a:xfrm>
-            <a:off x="457200" y="3954780"/>
-            <a:ext cx="3544824" cy="2080260"/>
+            <a:off x="457200" y="3909060"/>
+            <a:ext cx="3544824" cy="2034540"/>
           </a:xfrm>
           <a:prstGeom prst="roundRect">
             <a:avLst>
-              <a:gd name="adj" fmla="val 3077"/>
+              <a:gd name="adj" fmla="val 3146"/>
             </a:avLst>
           </a:prstGeom>
           <a:solidFill>
@@ -8294,7 +8353,7 @@
         </p:nvSpPr>
         <p:spPr>
           <a:xfrm>
-            <a:off x="658368" y="4155948"/>
+            <a:off x="658368" y="4110228"/>
             <a:ext cx="457200" cy="457200"/>
           </a:xfrm>
           <a:prstGeom prst="roundRect">
@@ -8316,7 +8375,7 @@
         </p:nvSpPr>
         <p:spPr>
           <a:xfrm>
-            <a:off x="658368" y="4155948"/>
+            <a:off x="658368" y="4110228"/>
             <a:ext cx="457200" cy="457200"/>
           </a:xfrm>
           <a:prstGeom prst="rect">
@@ -8355,7 +8414,7 @@
         </p:nvSpPr>
         <p:spPr>
           <a:xfrm>
-            <a:off x="1234440" y="4137660"/>
+            <a:off x="1234440" y="4091940"/>
             <a:ext cx="2584704" cy="502920"/>
           </a:xfrm>
           <a:prstGeom prst="rect">
@@ -8372,7 +8431,7 @@
               <a:buNone/>
             </a:pPr>
             <a:r>
-              <a:rPr lang="en-US" sz="1500" b="1" dirty="0">
+              <a:rPr lang="en-US" sz="1450" b="1" dirty="0">
                 <a:solidFill>
                   <a:srgbClr val="263947"/>
                 </a:solidFill>
@@ -8382,7 +8441,7 @@
               </a:rPr>
               <a:t>The landscape, grouped</a:t>
             </a:r>
-            <a:endParaRPr lang="en-US" sz="1500" dirty="0"/>
+            <a:endParaRPr lang="en-US" sz="1450" dirty="0"/>
           </a:p>
         </p:txBody>
       </p:sp>
@@ -8394,8 +8453,8 @@
         </p:nvSpPr>
         <p:spPr>
           <a:xfrm>
-            <a:off x="676656" y="4732020"/>
-            <a:ext cx="3105912" cy="1165860"/>
+            <a:off x="676656" y="4686300"/>
+            <a:ext cx="3105912" cy="1120140"/>
           </a:xfrm>
           <a:prstGeom prst="rect">
             <a:avLst/>
@@ -8411,7 +8470,7 @@
               <a:buNone/>
             </a:pPr>
             <a:r>
-              <a:rPr lang="en-US" sz="1250" dirty="0">
+              <a:rPr lang="en-US" sz="1200" dirty="0">
                 <a:solidFill>
                   <a:srgbClr val="263947"/>
                 </a:solidFill>
@@ -8421,7 +8480,7 @@
               </a:rPr>
               <a:t>Incumbents, hyperscaler silicon, and challengers — read through the framework, not as a catalog.</a:t>
             </a:r>
-            <a:endParaRPr lang="en-US" sz="1250" dirty="0"/>
+            <a:endParaRPr lang="en-US" sz="1200" dirty="0"/>
           </a:p>
         </p:txBody>
       </p:sp>
@@ -8433,12 +8492,12 @@
         </p:nvSpPr>
         <p:spPr>
           <a:xfrm>
-            <a:off x="4322064" y="3954780"/>
-            <a:ext cx="3544824" cy="2080260"/>
+            <a:off x="4322064" y="3909060"/>
+            <a:ext cx="3544824" cy="2034540"/>
           </a:xfrm>
           <a:prstGeom prst="roundRect">
             <a:avLst>
-              <a:gd name="adj" fmla="val 3077"/>
+              <a:gd name="adj" fmla="val 3146"/>
             </a:avLst>
           </a:prstGeom>
           <a:solidFill>
@@ -8460,7 +8519,7 @@
         </p:nvSpPr>
         <p:spPr>
           <a:xfrm>
-            <a:off x="4523232" y="4155948"/>
+            <a:off x="4523232" y="4110228"/>
             <a:ext cx="457200" cy="457200"/>
           </a:xfrm>
           <a:prstGeom prst="roundRect">
@@ -8482,7 +8541,7 @@
         </p:nvSpPr>
         <p:spPr>
           <a:xfrm>
-            <a:off x="4523232" y="4155948"/>
+            <a:off x="4523232" y="4110228"/>
             <a:ext cx="457200" cy="457200"/>
           </a:xfrm>
           <a:prstGeom prst="rect">
@@ -8521,7 +8580,7 @@
         </p:nvSpPr>
         <p:spPr>
           <a:xfrm>
-            <a:off x="5099304" y="4137660"/>
+            <a:off x="5099304" y="4091940"/>
             <a:ext cx="2584704" cy="502920"/>
           </a:xfrm>
           <a:prstGeom prst="rect">
@@ -8538,7 +8597,7 @@
               <a:buNone/>
             </a:pPr>
             <a:r>
-              <a:rPr lang="en-US" sz="1500" b="1" dirty="0">
+              <a:rPr lang="en-US" sz="1450" b="1" dirty="0">
                 <a:solidFill>
                   <a:srgbClr val="263947"/>
                 </a:solidFill>
@@ -8548,7 +8607,7 @@
               </a:rPr>
               <a:t>Economics</a:t>
             </a:r>
-            <a:endParaRPr lang="en-US" sz="1500" dirty="0"/>
+            <a:endParaRPr lang="en-US" sz="1450" dirty="0"/>
           </a:p>
         </p:txBody>
       </p:sp>
@@ -8560,8 +8619,8 @@
         </p:nvSpPr>
         <p:spPr>
           <a:xfrm>
-            <a:off x="4541520" y="4732020"/>
-            <a:ext cx="3105912" cy="1165860"/>
+            <a:off x="4541520" y="4686300"/>
+            <a:ext cx="3105912" cy="1120140"/>
           </a:xfrm>
           <a:prstGeom prst="rect">
             <a:avLst/>
@@ -8577,7 +8636,7 @@
               <a:buNone/>
             </a:pPr>
             <a:r>
-              <a:rPr lang="en-US" sz="1250" dirty="0">
+              <a:rPr lang="en-US" sz="1200" dirty="0">
                 <a:solidFill>
                   <a:srgbClr val="263947"/>
                 </a:solidFill>
@@ -8587,7 +8646,7 @@
               </a:rPr>
               <a:t>Why lifetime cost and software capital decide most outcomes.</a:t>
             </a:r>
-            <a:endParaRPr lang="en-US" sz="1250" dirty="0"/>
+            <a:endParaRPr lang="en-US" sz="1200" dirty="0"/>
           </a:p>
         </p:txBody>
       </p:sp>
@@ -8599,12 +8658,12 @@
         </p:nvSpPr>
         <p:spPr>
           <a:xfrm>
-            <a:off x="8186928" y="3954780"/>
-            <a:ext cx="3544824" cy="2080260"/>
+            <a:off x="8186928" y="3909060"/>
+            <a:ext cx="3544824" cy="2034540"/>
           </a:xfrm>
           <a:prstGeom prst="roundRect">
             <a:avLst>
-              <a:gd name="adj" fmla="val 3077"/>
+              <a:gd name="adj" fmla="val 3146"/>
             </a:avLst>
           </a:prstGeom>
           <a:solidFill>
@@ -8626,7 +8685,7 @@
         </p:nvSpPr>
         <p:spPr>
           <a:xfrm>
-            <a:off x="8388096" y="4155948"/>
+            <a:off x="8388096" y="4110228"/>
             <a:ext cx="457200" cy="457200"/>
           </a:xfrm>
           <a:prstGeom prst="roundRect">
@@ -8648,7 +8707,7 @@
         </p:nvSpPr>
         <p:spPr>
           <a:xfrm>
-            <a:off x="8388096" y="4155948"/>
+            <a:off x="8388096" y="4110228"/>
             <a:ext cx="457200" cy="457200"/>
           </a:xfrm>
           <a:prstGeom prst="rect">
@@ -8687,7 +8746,7 @@
         </p:nvSpPr>
         <p:spPr>
           <a:xfrm>
-            <a:off x="8964168" y="4137660"/>
+            <a:off x="8964168" y="4091940"/>
             <a:ext cx="2584704" cy="502920"/>
           </a:xfrm>
           <a:prstGeom prst="rect">
@@ -8704,7 +8763,7 @@
               <a:buNone/>
             </a:pPr>
             <a:r>
-              <a:rPr lang="en-US" sz="1500" b="1" dirty="0">
+              <a:rPr lang="en-US" sz="1450" b="1" dirty="0">
                 <a:solidFill>
                   <a:srgbClr val="263947"/>
                 </a:solidFill>
@@ -8714,7 +8773,7 @@
               </a:rPr>
               <a:t>Conclusions</a:t>
             </a:r>
-            <a:endParaRPr lang="en-US" sz="1500" dirty="0"/>
+            <a:endParaRPr lang="en-US" sz="1450" dirty="0"/>
           </a:p>
         </p:txBody>
       </p:sp>
@@ -8726,8 +8785,8 @@
         </p:nvSpPr>
         <p:spPr>
           <a:xfrm>
-            <a:off x="8406384" y="4732020"/>
-            <a:ext cx="3105912" cy="1165860"/>
+            <a:off x="8406384" y="4686300"/>
+            <a:ext cx="3105912" cy="1120140"/>
           </a:xfrm>
           <a:prstGeom prst="rect">
             <a:avLst/>
@@ -8743,7 +8802,7 @@
               <a:buNone/>
             </a:pPr>
             <a:r>
-              <a:rPr lang="en-US" sz="1250" dirty="0">
+              <a:rPr lang="en-US" sz="1200" dirty="0">
                 <a:solidFill>
                   <a:srgbClr val="263947"/>
                 </a:solidFill>
@@ -8753,7 +8812,7 @@
               </a:rPr>
               <a:t>What holds across the whole compute continuum.</a:t>
             </a:r>
-            <a:endParaRPr lang="en-US" sz="1250" dirty="0"/>
+            <a:endParaRPr lang="en-US" sz="1200" dirty="0"/>
           </a:p>
         </p:txBody>
       </p:sp>
@@ -8765,7 +8824,7 @@
         </p:nvSpPr>
         <p:spPr>
           <a:xfrm>
-            <a:off x="457200" y="6080760"/>
+            <a:off x="457200" y="6108192"/>
             <a:ext cx="11274552" cy="365760"/>
           </a:xfrm>
           <a:prstGeom prst="rect">
@@ -8819,19 +8878,19 @@
         <p:spPr>
           <a:xfrm>
             <a:off x="457200" y="6473952"/>
-            <a:ext cx="6400800" cy="274320"/>
-          </a:xfrm>
-          <a:prstGeom prst="rect">
-            <a:avLst/>
-          </a:prstGeom>
-          <a:noFill/>
-          <a:ln/>
-        </p:spPr>
-        <p:txBody>
-          <a:bodyPr wrap="square" rtlCol="0" anchor="ctr"/>
-          <a:lstStyle/>
-          <a:p>
-            <a:pPr algn="l" indent="0" marL="0">
+            <a:ext cx="7315200" cy="274320"/>
+          </a:xfrm>
+          <a:prstGeom prst="rect">
+            <a:avLst/>
+          </a:prstGeom>
+          <a:noFill/>
+          <a:ln/>
+        </p:spPr>
+        <p:txBody>
+          <a:bodyPr wrap="square" rtlCol="0" anchor="ctr"/>
+          <a:lstStyle/>
+          <a:p>
+            <a:pPr indent="0" marL="0">
               <a:buNone/>
             </a:pPr>
             <a:r>
@@ -9110,19 +9169,19 @@
         <p:spPr>
           <a:xfrm>
             <a:off x="457200" y="6473952"/>
-            <a:ext cx="6400800" cy="274320"/>
-          </a:xfrm>
-          <a:prstGeom prst="rect">
-            <a:avLst/>
-          </a:prstGeom>
-          <a:noFill/>
-          <a:ln/>
-        </p:spPr>
-        <p:txBody>
-          <a:bodyPr wrap="square" rtlCol="0" anchor="ctr"/>
-          <a:lstStyle/>
-          <a:p>
-            <a:pPr algn="l" indent="0" marL="0">
+            <a:ext cx="7315200" cy="274320"/>
+          </a:xfrm>
+          <a:prstGeom prst="rect">
+            <a:avLst/>
+          </a:prstGeom>
+          <a:noFill/>
+          <a:ln/>
+        </p:spPr>
+        <p:txBody>
+          <a:bodyPr wrap="square" rtlCol="0" anchor="ctr"/>
+          <a:lstStyle/>
+          <a:p>
+            <a:pPr indent="0" marL="0">
               <a:buNone/>
             </a:pPr>
             <a:r>
@@ -9320,7 +9379,7 @@
         </p:nvSpPr>
         <p:spPr>
           <a:xfrm>
-            <a:off x="8138160" y="1801368"/>
+            <a:off x="8138160" y="1847088"/>
             <a:ext cx="109728" cy="109728"/>
           </a:xfrm>
           <a:prstGeom prst="rect">
@@ -9340,8 +9399,8 @@
         </p:nvSpPr>
         <p:spPr>
           <a:xfrm>
-            <a:off x="8366760" y="1627632"/>
-            <a:ext cx="3291840" cy="640080"/>
+            <a:off x="8366760" y="1673352"/>
+            <a:ext cx="3291840" cy="731520"/>
           </a:xfrm>
           <a:prstGeom prst="rect">
             <a:avLst/>
@@ -9357,7 +9416,7 @@
               <a:buNone/>
             </a:pPr>
             <a:r>
-              <a:rPr lang="en-US" sz="1350" dirty="0">
+              <a:rPr lang="en-US" sz="1300" dirty="0">
                 <a:solidFill>
                   <a:srgbClr val="263947"/>
                 </a:solidFill>
@@ -9367,7 +9426,7 @@
               </a:rPr>
               <a:t>Fixed cost ≈ software enablement.</a:t>
             </a:r>
-            <a:endParaRPr lang="en-US" sz="1350" dirty="0"/>
+            <a:endParaRPr lang="en-US" sz="1300" dirty="0"/>
           </a:p>
         </p:txBody>
       </p:sp>
@@ -9379,7 +9438,7 @@
         </p:nvSpPr>
         <p:spPr>
           <a:xfrm>
-            <a:off x="8138160" y="2551176"/>
+            <a:off x="8138160" y="2596896"/>
             <a:ext cx="109728" cy="109728"/>
           </a:xfrm>
           <a:prstGeom prst="rect">
@@ -9399,8 +9458,8 @@
         </p:nvSpPr>
         <p:spPr>
           <a:xfrm>
-            <a:off x="8366760" y="2377440"/>
-            <a:ext cx="3291840" cy="640080"/>
+            <a:off x="8366760" y="2423160"/>
+            <a:ext cx="3291840" cy="731520"/>
           </a:xfrm>
           <a:prstGeom prst="rect">
             <a:avLst/>
@@ -9416,7 +9475,7 @@
               <a:buNone/>
             </a:pPr>
             <a:r>
-              <a:rPr lang="en-US" sz="1350" dirty="0">
+              <a:rPr lang="en-US" sz="1300" dirty="0">
                 <a:solidFill>
                   <a:srgbClr val="263947"/>
                 </a:solidFill>
@@ -9426,7 +9485,7 @@
               </a:rPr>
               <a:t>Recurring savings scale with volume.</a:t>
             </a:r>
-            <a:endParaRPr lang="en-US" sz="1350" dirty="0"/>
+            <a:endParaRPr lang="en-US" sz="1300" dirty="0"/>
           </a:p>
         </p:txBody>
       </p:sp>
@@ -9438,7 +9497,7 @@
         </p:nvSpPr>
         <p:spPr>
           <a:xfrm>
-            <a:off x="8138160" y="3300984"/>
+            <a:off x="8138160" y="3346704"/>
             <a:ext cx="109728" cy="109728"/>
           </a:xfrm>
           <a:prstGeom prst="rect">
@@ -9458,8 +9517,8 @@
         </p:nvSpPr>
         <p:spPr>
           <a:xfrm>
-            <a:off x="8366760" y="3127248"/>
-            <a:ext cx="3291840" cy="640080"/>
+            <a:off x="8366760" y="3172968"/>
+            <a:ext cx="3291840" cy="731520"/>
           </a:xfrm>
           <a:prstGeom prst="rect">
             <a:avLst/>
@@ -9475,7 +9534,7 @@
               <a:buNone/>
             </a:pPr>
             <a:r>
-              <a:rPr lang="en-US" sz="1350" dirty="0">
+              <a:rPr lang="en-US" sz="1300" dirty="0">
                 <a:solidFill>
                   <a:srgbClr val="263947"/>
                 </a:solidFill>
@@ -9485,7 +9544,7 @@
               </a:rPr>
               <a:t>Flexibility has option value.</a:t>
             </a:r>
-            <a:endParaRPr lang="en-US" sz="1350" dirty="0"/>
+            <a:endParaRPr lang="en-US" sz="1300" dirty="0"/>
           </a:p>
         </p:txBody>
       </p:sp>
@@ -9578,19 +9637,19 @@
         <p:spPr>
           <a:xfrm>
             <a:off x="457200" y="6473952"/>
-            <a:ext cx="6400800" cy="274320"/>
-          </a:xfrm>
-          <a:prstGeom prst="rect">
-            <a:avLst/>
-          </a:prstGeom>
-          <a:noFill/>
-          <a:ln/>
-        </p:spPr>
-        <p:txBody>
-          <a:bodyPr wrap="square" rtlCol="0" anchor="ctr"/>
-          <a:lstStyle/>
-          <a:p>
-            <a:pPr algn="l" indent="0" marL="0">
+            <a:ext cx="7315200" cy="274320"/>
+          </a:xfrm>
+          <a:prstGeom prst="rect">
+            <a:avLst/>
+          </a:prstGeom>
+          <a:noFill/>
+          <a:ln/>
+        </p:spPr>
+        <p:txBody>
+          <a:bodyPr wrap="square" rtlCol="0" anchor="ctr"/>
+          <a:lstStyle/>
+          <a:p>
+            <a:pPr indent="0" marL="0">
               <a:buNone/>
             </a:pPr>
             <a:r>
@@ -9766,11 +9825,11 @@
         <p:spPr>
           <a:xfrm>
             <a:off x="457200" y="1600200"/>
-            <a:ext cx="5477256" cy="1295400"/>
+            <a:ext cx="5477256" cy="1356360"/>
           </a:xfrm>
           <a:prstGeom prst="roundRect">
             <a:avLst>
-              <a:gd name="adj" fmla="val 4941"/>
+              <a:gd name="adj" fmla="val 4719"/>
             </a:avLst>
           </a:prstGeom>
           <a:solidFill>
@@ -9870,7 +9929,7 @@
               <a:buNone/>
             </a:pPr>
             <a:r>
-              <a:rPr lang="en-US" sz="1500" b="1" dirty="0">
+              <a:rPr lang="en-US" sz="1450" b="1" dirty="0">
                 <a:solidFill>
                   <a:srgbClr val="263947"/>
                 </a:solidFill>
@@ -9880,7 +9939,7 @@
               </a:rPr>
               <a:t>Software converges on physics</a:t>
             </a:r>
-            <a:endParaRPr lang="en-US" sz="1500" dirty="0"/>
+            <a:endParaRPr lang="en-US" sz="1450" dirty="0"/>
           </a:p>
         </p:txBody>
       </p:sp>
@@ -9893,7 +9952,7 @@
         <p:spPr>
           <a:xfrm>
             <a:off x="676656" y="2377440"/>
-            <a:ext cx="5038344" cy="381000"/>
+            <a:ext cx="5038344" cy="441960"/>
           </a:xfrm>
           <a:prstGeom prst="rect">
             <a:avLst/>
@@ -9909,7 +9968,7 @@
               <a:buNone/>
             </a:pPr>
             <a:r>
-              <a:rPr lang="en-US" sz="1250" dirty="0">
+              <a:rPr lang="en-US" sz="1200" dirty="0">
                 <a:solidFill>
                   <a:srgbClr val="263947"/>
                 </a:solidFill>
@@ -9919,7 +9978,7 @@
               </a:rPr>
               <a:t>Both transitions are software succeeding until it exposes a hard, measurable bound.</a:t>
             </a:r>
-            <a:endParaRPr lang="en-US" sz="1250" dirty="0"/>
+            <a:endParaRPr lang="en-US" sz="1200" dirty="0"/>
           </a:p>
         </p:txBody>
       </p:sp>
@@ -9932,11 +9991,11 @@
         <p:spPr>
           <a:xfrm>
             <a:off x="6254496" y="1600200"/>
-            <a:ext cx="5477256" cy="1295400"/>
+            <a:ext cx="5477256" cy="1356360"/>
           </a:xfrm>
           <a:prstGeom prst="roundRect">
             <a:avLst>
-              <a:gd name="adj" fmla="val 4941"/>
+              <a:gd name="adj" fmla="val 4719"/>
             </a:avLst>
           </a:prstGeom>
           <a:solidFill>
@@ -10036,7 +10095,7 @@
               <a:buNone/>
             </a:pPr>
             <a:r>
-              <a:rPr lang="en-US" sz="1500" b="1" dirty="0">
+              <a:rPr lang="en-US" sz="1450" b="1" dirty="0">
                 <a:solidFill>
                   <a:srgbClr val="263947"/>
                 </a:solidFill>
@@ -10046,7 +10105,7 @@
               </a:rPr>
               <a:t>Necessity is decidable</a:t>
             </a:r>
-            <a:endParaRPr lang="en-US" sz="1500" dirty="0"/>
+            <a:endParaRPr lang="en-US" sz="1450" dirty="0"/>
           </a:p>
         </p:txBody>
       </p:sp>
@@ -10059,7 +10118,7 @@
         <p:spPr>
           <a:xfrm>
             <a:off x="6473952" y="2377440"/>
-            <a:ext cx="5038344" cy="381000"/>
+            <a:ext cx="5038344" cy="441960"/>
           </a:xfrm>
           <a:prstGeom prst="rect">
             <a:avLst/>
@@ -10075,7 +10134,7 @@
               <a:buNone/>
             </a:pPr>
             <a:r>
-              <a:rPr lang="en-US" sz="1250" dirty="0">
+              <a:rPr lang="en-US" sz="1200" dirty="0">
                 <a:solidFill>
                   <a:srgbClr val="263947"/>
                 </a:solidFill>
@@ -10085,7 +10144,7 @@
               </a:rPr>
               <a:t>A four-condition test returns specialize / market-no / stay-on-GPU — from measurable inputs.</a:t>
             </a:r>
-            <a:endParaRPr lang="en-US" sz="1250" dirty="0"/>
+            <a:endParaRPr lang="en-US" sz="1200" dirty="0"/>
           </a:p>
         </p:txBody>
       </p:sp>
@@ -10097,12 +10156,12 @@
         </p:nvSpPr>
         <p:spPr>
           <a:xfrm>
-            <a:off x="457200" y="3169920"/>
-            <a:ext cx="5477256" cy="1295400"/>
+            <a:off x="457200" y="3230880"/>
+            <a:ext cx="5477256" cy="1356360"/>
           </a:xfrm>
           <a:prstGeom prst="roundRect">
             <a:avLst>
-              <a:gd name="adj" fmla="val 4941"/>
+              <a:gd name="adj" fmla="val 4719"/>
             </a:avLst>
           </a:prstGeom>
           <a:solidFill>
@@ -10124,7 +10183,7 @@
         </p:nvSpPr>
         <p:spPr>
           <a:xfrm>
-            <a:off x="658368" y="3371088"/>
+            <a:off x="658368" y="3432048"/>
             <a:ext cx="457200" cy="457200"/>
           </a:xfrm>
           <a:prstGeom prst="roundRect">
@@ -10146,7 +10205,7 @@
         </p:nvSpPr>
         <p:spPr>
           <a:xfrm>
-            <a:off x="658368" y="3371088"/>
+            <a:off x="658368" y="3432048"/>
             <a:ext cx="457200" cy="457200"/>
           </a:xfrm>
           <a:prstGeom prst="rect">
@@ -10185,7 +10244,7 @@
         </p:nvSpPr>
         <p:spPr>
           <a:xfrm>
-            <a:off x="1234440" y="3352800"/>
+            <a:off x="1234440" y="3413760"/>
             <a:ext cx="4517136" cy="502920"/>
           </a:xfrm>
           <a:prstGeom prst="rect">
@@ -10202,7 +10261,7 @@
               <a:buNone/>
             </a:pPr>
             <a:r>
-              <a:rPr lang="en-US" sz="1500" b="1" dirty="0">
+              <a:rPr lang="en-US" sz="1450" b="1" dirty="0">
                 <a:solidFill>
                   <a:srgbClr val="263947"/>
                 </a:solidFill>
@@ -10212,7 +10271,7 @@
               </a:rPr>
               <a:t>Condition 4 dominates</a:t>
             </a:r>
-            <a:endParaRPr lang="en-US" sz="1500" dirty="0"/>
+            <a:endParaRPr lang="en-US" sz="1450" dirty="0"/>
           </a:p>
         </p:txBody>
       </p:sp>
@@ -10224,8 +10283,8 @@
         </p:nvSpPr>
         <p:spPr>
           <a:xfrm>
-            <a:off x="676656" y="3947160"/>
-            <a:ext cx="5038344" cy="381000"/>
+            <a:off x="676656" y="4008120"/>
+            <a:ext cx="5038344" cy="441960"/>
           </a:xfrm>
           <a:prstGeom prst="rect">
             <a:avLst/>
@@ -10241,7 +10300,7 @@
               <a:buNone/>
             </a:pPr>
             <a:r>
-              <a:rPr lang="en-US" sz="1250" dirty="0">
+              <a:rPr lang="en-US" sz="1200" dirty="0">
                 <a:solidFill>
                   <a:srgbClr val="263947"/>
                 </a:solidFill>
@@ -10251,7 +10310,7 @@
               </a:rPr>
               <a:t>Software capital, volume, and distribution decide outcomes more than silicon merit.</a:t>
             </a:r>
-            <a:endParaRPr lang="en-US" sz="1250" dirty="0"/>
+            <a:endParaRPr lang="en-US" sz="1200" dirty="0"/>
           </a:p>
         </p:txBody>
       </p:sp>
@@ -10263,12 +10322,12 @@
         </p:nvSpPr>
         <p:spPr>
           <a:xfrm>
-            <a:off x="6254496" y="3169920"/>
-            <a:ext cx="5477256" cy="1295400"/>
+            <a:off x="6254496" y="3230880"/>
+            <a:ext cx="5477256" cy="1356360"/>
           </a:xfrm>
           <a:prstGeom prst="roundRect">
             <a:avLst>
-              <a:gd name="adj" fmla="val 4941"/>
+              <a:gd name="adj" fmla="val 4719"/>
             </a:avLst>
           </a:prstGeom>
           <a:solidFill>
@@ -10290,7 +10349,7 @@
         </p:nvSpPr>
         <p:spPr>
           <a:xfrm>
-            <a:off x="6455664" y="3371088"/>
+            <a:off x="6455664" y="3432048"/>
             <a:ext cx="457200" cy="457200"/>
           </a:xfrm>
           <a:prstGeom prst="roundRect">
@@ -10312,7 +10371,7 @@
         </p:nvSpPr>
         <p:spPr>
           <a:xfrm>
-            <a:off x="6455664" y="3371088"/>
+            <a:off x="6455664" y="3432048"/>
             <a:ext cx="457200" cy="457200"/>
           </a:xfrm>
           <a:prstGeom prst="rect">
@@ -10351,7 +10410,7 @@
         </p:nvSpPr>
         <p:spPr>
           <a:xfrm>
-            <a:off x="7031736" y="3352800"/>
+            <a:off x="7031736" y="3413760"/>
             <a:ext cx="4517136" cy="502920"/>
           </a:xfrm>
           <a:prstGeom prst="rect">
@@ -10368,7 +10427,7 @@
               <a:buNone/>
             </a:pPr>
             <a:r>
-              <a:rPr lang="en-US" sz="1500" b="1" dirty="0">
+              <a:rPr lang="en-US" sz="1450" b="1" dirty="0">
                 <a:solidFill>
                   <a:srgbClr val="263947"/>
                 </a:solidFill>
@@ -10378,7 +10437,7 @@
               </a:rPr>
               <a:t>Families, not a successor</a:t>
             </a:r>
-            <a:endParaRPr lang="en-US" sz="1500" dirty="0"/>
+            <a:endParaRPr lang="en-US" sz="1450" dirty="0"/>
           </a:p>
         </p:txBody>
       </p:sp>
@@ -10390,8 +10449,8 @@
         </p:nvSpPr>
         <p:spPr>
           <a:xfrm>
-            <a:off x="6473952" y="3947160"/>
-            <a:ext cx="5038344" cy="381000"/>
+            <a:off x="6473952" y="4008120"/>
+            <a:ext cx="5038344" cy="441960"/>
           </a:xfrm>
           <a:prstGeom prst="rect">
             <a:avLst/>
@@ -10407,7 +10466,7 @@
               <a:buNone/>
             </a:pPr>
             <a:r>
-              <a:rPr lang="en-US" sz="1250" dirty="0">
+              <a:rPr lang="en-US" sz="1200" dirty="0">
                 <a:solidFill>
                   <a:srgbClr val="263947"/>
                 </a:solidFill>
@@ -10417,7 +10476,7 @@
               </a:rPr>
               <a:t>Each changes a contract the GPU cannot adopt without ceasing to be a GPU.</a:t>
             </a:r>
-            <a:endParaRPr lang="en-US" sz="1250" dirty="0"/>
+            <a:endParaRPr lang="en-US" sz="1200" dirty="0"/>
           </a:p>
         </p:txBody>
       </p:sp>
@@ -10429,12 +10488,12 @@
         </p:nvSpPr>
         <p:spPr>
           <a:xfrm>
-            <a:off x="457200" y="4739640"/>
-            <a:ext cx="5477256" cy="1295400"/>
+            <a:off x="457200" y="4861560"/>
+            <a:ext cx="5477256" cy="1356360"/>
           </a:xfrm>
           <a:prstGeom prst="roundRect">
             <a:avLst>
-              <a:gd name="adj" fmla="val 4941"/>
+              <a:gd name="adj" fmla="val 4719"/>
             </a:avLst>
           </a:prstGeom>
           <a:solidFill>
@@ -10456,7 +10515,7 @@
         </p:nvSpPr>
         <p:spPr>
           <a:xfrm>
-            <a:off x="658368" y="4940808"/>
+            <a:off x="658368" y="5062728"/>
             <a:ext cx="457200" cy="457200"/>
           </a:xfrm>
           <a:prstGeom prst="roundRect">
@@ -10478,7 +10537,7 @@
         </p:nvSpPr>
         <p:spPr>
           <a:xfrm>
-            <a:off x="658368" y="4940808"/>
+            <a:off x="658368" y="5062728"/>
             <a:ext cx="457200" cy="457200"/>
           </a:xfrm>
           <a:prstGeom prst="rect">
@@ -10517,7 +10576,7 @@
         </p:nvSpPr>
         <p:spPr>
           <a:xfrm>
-            <a:off x="1234440" y="4922520"/>
+            <a:off x="1234440" y="5044440"/>
             <a:ext cx="4517136" cy="502920"/>
           </a:xfrm>
           <a:prstGeom prst="rect">
@@ -10534,7 +10593,7 @@
               <a:buNone/>
             </a:pPr>
             <a:r>
-              <a:rPr lang="en-US" sz="1500" b="1" dirty="0">
+              <a:rPr lang="en-US" sz="1450" b="1" dirty="0">
                 <a:solidFill>
                   <a:srgbClr val="263947"/>
                 </a:solidFill>
@@ -10544,7 +10603,7 @@
               </a:rPr>
               <a:t>Bounds moved to memory &amp; power</a:t>
             </a:r>
-            <a:endParaRPr lang="en-US" sz="1500" dirty="0"/>
+            <a:endParaRPr lang="en-US" sz="1450" dirty="0"/>
           </a:p>
         </p:txBody>
       </p:sp>
@@ -10556,8 +10615,8 @@
         </p:nvSpPr>
         <p:spPr>
           <a:xfrm>
-            <a:off x="676656" y="5516880"/>
-            <a:ext cx="5038344" cy="381000"/>
+            <a:off x="676656" y="5638800"/>
+            <a:ext cx="5038344" cy="441960"/>
           </a:xfrm>
           <a:prstGeom prst="rect">
             <a:avLst/>
@@ -10573,7 +10632,7 @@
               <a:buNone/>
             </a:pPr>
             <a:r>
-              <a:rPr lang="en-US" sz="1250" dirty="0">
+              <a:rPr lang="en-US" sz="1200" dirty="0">
                 <a:solidFill>
                   <a:srgbClr val="263947"/>
                 </a:solidFill>
@@ -10583,7 +10642,7 @@
               </a:rPr>
               <a:t>Capacity, bandwidth, fabric, and facility power now separate contenders — not FLOPS.</a:t>
             </a:r>
-            <a:endParaRPr lang="en-US" sz="1250" dirty="0"/>
+            <a:endParaRPr lang="en-US" sz="1200" dirty="0"/>
           </a:p>
         </p:txBody>
       </p:sp>
@@ -10595,12 +10654,12 @@
         </p:nvSpPr>
         <p:spPr>
           <a:xfrm>
-            <a:off x="6254496" y="4739640"/>
-            <a:ext cx="5477256" cy="1295400"/>
+            <a:off x="6254496" y="4861560"/>
+            <a:ext cx="5477256" cy="1356360"/>
           </a:xfrm>
           <a:prstGeom prst="roundRect">
             <a:avLst>
-              <a:gd name="adj" fmla="val 4941"/>
+              <a:gd name="adj" fmla="val 4719"/>
             </a:avLst>
           </a:prstGeom>
           <a:solidFill>
@@ -10622,7 +10681,7 @@
         </p:nvSpPr>
         <p:spPr>
           <a:xfrm>
-            <a:off x="6455664" y="4940808"/>
+            <a:off x="6455664" y="5062728"/>
             <a:ext cx="457200" cy="457200"/>
           </a:xfrm>
           <a:prstGeom prst="roundRect">
@@ -10644,7 +10703,7 @@
         </p:nvSpPr>
         <p:spPr>
           <a:xfrm>
-            <a:off x="6455664" y="4940808"/>
+            <a:off x="6455664" y="5062728"/>
             <a:ext cx="457200" cy="457200"/>
           </a:xfrm>
           <a:prstGeom prst="rect">
@@ -10683,7 +10742,7 @@
         </p:nvSpPr>
         <p:spPr>
           <a:xfrm>
-            <a:off x="7031736" y="4922520"/>
+            <a:off x="7031736" y="5044440"/>
             <a:ext cx="4517136" cy="502920"/>
           </a:xfrm>
           <a:prstGeom prst="rect">
@@ -10700,7 +10759,7 @@
               <a:buNone/>
             </a:pPr>
             <a:r>
-              <a:rPr lang="en-US" sz="1500" b="1" dirty="0">
+              <a:rPr lang="en-US" sz="1450" b="1" dirty="0">
                 <a:solidFill>
                   <a:srgbClr val="263947"/>
                 </a:solidFill>
@@ -10710,7 +10769,7 @@
               </a:rPr>
               <a:t>One continuum</a:t>
             </a:r>
-            <a:endParaRPr lang="en-US" sz="1500" dirty="0"/>
+            <a:endParaRPr lang="en-US" sz="1450" dirty="0"/>
           </a:p>
         </p:txBody>
       </p:sp>
@@ -10722,8 +10781,8 @@
         </p:nvSpPr>
         <p:spPr>
           <a:xfrm>
-            <a:off x="6473952" y="5516880"/>
-            <a:ext cx="5038344" cy="381000"/>
+            <a:off x="6473952" y="5638800"/>
+            <a:ext cx="5038344" cy="441960"/>
           </a:xfrm>
           <a:prstGeom prst="rect">
             <a:avLst/>
@@ -10739,7 +10798,7 @@
               <a:buNone/>
             </a:pPr>
             <a:r>
-              <a:rPr lang="en-US" sz="1250" dirty="0">
+              <a:rPr lang="en-US" sz="1200" dirty="0">
                 <a:solidFill>
                   <a:srgbClr val="263947"/>
                 </a:solidFill>
@@ -10749,7 +10808,7 @@
               </a:rPr>
               <a:t>The same taxonomy reads microwatt silicon and megawatt pods.</a:t>
             </a:r>
-            <a:endParaRPr lang="en-US" sz="1250" dirty="0"/>
+            <a:endParaRPr lang="en-US" sz="1200" dirty="0"/>
           </a:p>
         </p:txBody>
       </p:sp>
@@ -10762,19 +10821,19 @@
         <p:spPr>
           <a:xfrm>
             <a:off x="457200" y="6473952"/>
-            <a:ext cx="6400800" cy="274320"/>
-          </a:xfrm>
-          <a:prstGeom prst="rect">
-            <a:avLst/>
-          </a:prstGeom>
-          <a:noFill/>
-          <a:ln/>
-        </p:spPr>
-        <p:txBody>
-          <a:bodyPr wrap="square" rtlCol="0" anchor="ctr"/>
-          <a:lstStyle/>
-          <a:p>
-            <a:pPr algn="l" indent="0" marL="0">
+            <a:ext cx="7315200" cy="274320"/>
+          </a:xfrm>
+          <a:prstGeom prst="rect">
+            <a:avLst/>
+          </a:prstGeom>
+          <a:noFill/>
+          <a:ln/>
+        </p:spPr>
+        <p:txBody>
+          <a:bodyPr wrap="square" rtlCol="0" anchor="ctr"/>
+          <a:lstStyle/>
+          <a:p>
+            <a:pPr indent="0" marL="0">
               <a:buNone/>
             </a:pPr>
             <a:r>
@@ -10992,19 +11051,19 @@
         <p:spPr>
           <a:xfrm>
             <a:off x="457200" y="6473952"/>
-            <a:ext cx="6400800" cy="274320"/>
-          </a:xfrm>
-          <a:prstGeom prst="rect">
-            <a:avLst/>
-          </a:prstGeom>
-          <a:noFill/>
-          <a:ln/>
-        </p:spPr>
-        <p:txBody>
-          <a:bodyPr wrap="square" rtlCol="0" anchor="ctr"/>
-          <a:lstStyle/>
-          <a:p>
-            <a:pPr algn="l" indent="0" marL="0">
+            <a:ext cx="7315200" cy="274320"/>
+          </a:xfrm>
+          <a:prstGeom prst="rect">
+            <a:avLst/>
+          </a:prstGeom>
+          <a:noFill/>
+          <a:ln/>
+        </p:spPr>
+        <p:txBody>
+          <a:bodyPr wrap="square" rtlCol="0" anchor="ctr"/>
+          <a:lstStyle/>
+          <a:p>
+            <a:pPr indent="0" marL="0">
               <a:buNone/>
             </a:pPr>
             <a:r>
@@ -11180,11 +11239,11 @@
         <p:spPr>
           <a:xfrm>
             <a:off x="457200" y="1600200"/>
-            <a:ext cx="3544824" cy="2080260"/>
+            <a:ext cx="3544824" cy="2171700"/>
           </a:xfrm>
           <a:prstGeom prst="roundRect">
             <a:avLst>
-              <a:gd name="adj" fmla="val 3077"/>
+              <a:gd name="adj" fmla="val 2947"/>
             </a:avLst>
           </a:prstGeom>
           <a:solidFill>
@@ -11245,7 +11304,7 @@
               <a:buNone/>
             </a:pPr>
             <a:r>
-              <a:rPr lang="en-US" sz="1500" b="1" dirty="0">
+              <a:rPr lang="en-US" sz="1450" b="1" dirty="0">
                 <a:solidFill>
                   <a:srgbClr val="263947"/>
                 </a:solidFill>
@@ -11255,7 +11314,7 @@
               </a:rPr>
               <a:t>GPU</a:t>
             </a:r>
-            <a:endParaRPr lang="en-US" sz="1500" dirty="0"/>
+            <a:endParaRPr lang="en-US" sz="1450" dirty="0"/>
           </a:p>
         </p:txBody>
       </p:sp>
@@ -11268,7 +11327,7 @@
         <p:spPr>
           <a:xfrm>
             <a:off x="676656" y="2377440"/>
-            <a:ext cx="3105912" cy="1165860"/>
+            <a:ext cx="3105912" cy="1257300"/>
           </a:xfrm>
           <a:prstGeom prst="rect">
             <a:avLst/>
@@ -11284,7 +11343,7 @@
               <a:buNone/>
             </a:pPr>
             <a:r>
-              <a:rPr lang="en-US" sz="1250" dirty="0">
+              <a:rPr lang="en-US" sz="1200" dirty="0">
                 <a:solidFill>
                   <a:srgbClr val="263947"/>
                 </a:solidFill>
@@ -11294,7 +11353,7 @@
               </a:rPr>
               <a:t>Thousands of parallel lanes. Fast when work is regular, batched, and streamed from high-bandwidth memory.</a:t>
             </a:r>
-            <a:endParaRPr lang="en-US" sz="1250" dirty="0"/>
+            <a:endParaRPr lang="en-US" sz="1200" dirty="0"/>
           </a:p>
         </p:txBody>
       </p:sp>
@@ -11307,11 +11366,11 @@
         <p:spPr>
           <a:xfrm>
             <a:off x="4322064" y="1600200"/>
-            <a:ext cx="3544824" cy="2080260"/>
+            <a:ext cx="3544824" cy="2171700"/>
           </a:xfrm>
           <a:prstGeom prst="roundRect">
             <a:avLst>
-              <a:gd name="adj" fmla="val 3077"/>
+              <a:gd name="adj" fmla="val 2947"/>
             </a:avLst>
           </a:prstGeom>
           <a:solidFill>
@@ -11372,7 +11431,7 @@
               <a:buNone/>
             </a:pPr>
             <a:r>
-              <a:rPr lang="en-US" sz="1500" b="1" dirty="0">
+              <a:rPr lang="en-US" sz="1450" b="1" dirty="0">
                 <a:solidFill>
                   <a:srgbClr val="263947"/>
                 </a:solidFill>
@@ -11382,7 +11441,7 @@
               </a:rPr>
               <a:t>Matrix / tensor engine</a:t>
             </a:r>
-            <a:endParaRPr lang="en-US" sz="1500" dirty="0"/>
+            <a:endParaRPr lang="en-US" sz="1450" dirty="0"/>
           </a:p>
         </p:txBody>
       </p:sp>
@@ -11395,7 +11454,7 @@
         <p:spPr>
           <a:xfrm>
             <a:off x="4541520" y="2377440"/>
-            <a:ext cx="3105912" cy="1165860"/>
+            <a:ext cx="3105912" cy="1257300"/>
           </a:xfrm>
           <a:prstGeom prst="rect">
             <a:avLst/>
@@ -11411,7 +11470,7 @@
               <a:buNone/>
             </a:pPr>
             <a:r>
-              <a:rPr lang="en-US" sz="1250" dirty="0">
+              <a:rPr lang="en-US" sz="1200" dirty="0">
                 <a:solidFill>
                   <a:srgbClr val="263947"/>
                 </a:solidFill>
@@ -11421,7 +11480,7 @@
               </a:rPr>
               <a:t>A block that does a whole matrix tile per instruction — amortizes control over many multiply-adds.</a:t>
             </a:r>
-            <a:endParaRPr lang="en-US" sz="1250" dirty="0"/>
+            <a:endParaRPr lang="en-US" sz="1200" dirty="0"/>
           </a:p>
         </p:txBody>
       </p:sp>
@@ -11434,11 +11493,11 @@
         <p:spPr>
           <a:xfrm>
             <a:off x="8186928" y="1600200"/>
-            <a:ext cx="3544824" cy="2080260"/>
+            <a:ext cx="3544824" cy="2171700"/>
           </a:xfrm>
           <a:prstGeom prst="roundRect">
             <a:avLst>
-              <a:gd name="adj" fmla="val 3077"/>
+              <a:gd name="adj" fmla="val 2947"/>
             </a:avLst>
           </a:prstGeom>
           <a:solidFill>
@@ -11499,7 +11558,7 @@
               <a:buNone/>
             </a:pPr>
             <a:r>
-              <a:rPr lang="en-US" sz="1500" b="1" dirty="0">
+              <a:rPr lang="en-US" sz="1450" b="1" dirty="0">
                 <a:solidFill>
                   <a:srgbClr val="263947"/>
                 </a:solidFill>
@@ -11509,7 +11568,7 @@
               </a:rPr>
               <a:t>HBM</a:t>
             </a:r>
-            <a:endParaRPr lang="en-US" sz="1500" dirty="0"/>
+            <a:endParaRPr lang="en-US" sz="1450" dirty="0"/>
           </a:p>
         </p:txBody>
       </p:sp>
@@ -11522,7 +11581,7 @@
         <p:spPr>
           <a:xfrm>
             <a:off x="8406384" y="2377440"/>
-            <a:ext cx="3105912" cy="1165860"/>
+            <a:ext cx="3105912" cy="1257300"/>
           </a:xfrm>
           <a:prstGeom prst="rect">
             <a:avLst/>
@@ -11538,7 +11597,7 @@
               <a:buNone/>
             </a:pPr>
             <a:r>
-              <a:rPr lang="en-US" sz="1250" dirty="0">
+              <a:rPr lang="en-US" sz="1200" dirty="0">
                 <a:solidFill>
                   <a:srgbClr val="263947"/>
                 </a:solidFill>
@@ -11548,7 +11607,7 @@
               </a:rPr>
               <a:t>Stacked DRAM giving multi-TB/s. The scarce resource: capacity and bandwidth, not arithmetic.</a:t>
             </a:r>
-            <a:endParaRPr lang="en-US" sz="1250" dirty="0"/>
+            <a:endParaRPr lang="en-US" sz="1200" dirty="0"/>
           </a:p>
         </p:txBody>
       </p:sp>
@@ -11560,12 +11619,12 @@
         </p:nvSpPr>
         <p:spPr>
           <a:xfrm>
-            <a:off x="457200" y="3954780"/>
-            <a:ext cx="3544824" cy="2080260"/>
+            <a:off x="457200" y="4046220"/>
+            <a:ext cx="3544824" cy="2171700"/>
           </a:xfrm>
           <a:prstGeom prst="roundRect">
             <a:avLst>
-              <a:gd name="adj" fmla="val 3077"/>
+              <a:gd name="adj" fmla="val 2947"/>
             </a:avLst>
           </a:prstGeom>
           <a:solidFill>
@@ -11587,7 +11646,7 @@
         </p:nvSpPr>
         <p:spPr>
           <a:xfrm>
-            <a:off x="658368" y="4155948"/>
+            <a:off x="658368" y="4247388"/>
             <a:ext cx="457200" cy="457200"/>
           </a:xfrm>
           <a:prstGeom prst="roundRect">
@@ -11609,7 +11668,7 @@
         </p:nvSpPr>
         <p:spPr>
           <a:xfrm>
-            <a:off x="1234440" y="4137660"/>
+            <a:off x="1234440" y="4229100"/>
             <a:ext cx="2584704" cy="502920"/>
           </a:xfrm>
           <a:prstGeom prst="rect">
@@ -11626,7 +11685,7 @@
               <a:buNone/>
             </a:pPr>
             <a:r>
-              <a:rPr lang="en-US" sz="1500" b="1" dirty="0">
+              <a:rPr lang="en-US" sz="1450" b="1" dirty="0">
                 <a:solidFill>
                   <a:srgbClr val="263947"/>
                 </a:solidFill>
@@ -11636,7 +11695,7 @@
               </a:rPr>
               <a:t>NPU</a:t>
             </a:r>
-            <a:endParaRPr lang="en-US" sz="1500" dirty="0"/>
+            <a:endParaRPr lang="en-US" sz="1450" dirty="0"/>
           </a:p>
         </p:txBody>
       </p:sp>
@@ -11648,8 +11707,8 @@
         </p:nvSpPr>
         <p:spPr>
           <a:xfrm>
-            <a:off x="676656" y="4732020"/>
-            <a:ext cx="3105912" cy="1165860"/>
+            <a:off x="676656" y="4823460"/>
+            <a:ext cx="3105912" cy="1257300"/>
           </a:xfrm>
           <a:prstGeom prst="rect">
             <a:avLst/>
@@ -11665,7 +11724,7 @@
               <a:buNone/>
             </a:pPr>
             <a:r>
-              <a:rPr lang="en-US" sz="1250" dirty="0">
+              <a:rPr lang="en-US" sz="1200" dirty="0">
                 <a:solidFill>
                   <a:srgbClr val="263947"/>
                 </a:solidFill>
@@ -11675,7 +11734,7 @@
               </a:rPr>
               <a:t>An SoC block plus a compiler that maps a whole model graph onto it at low energy.</a:t>
             </a:r>
-            <a:endParaRPr lang="en-US" sz="1250" dirty="0"/>
+            <a:endParaRPr lang="en-US" sz="1200" dirty="0"/>
           </a:p>
         </p:txBody>
       </p:sp>
@@ -11687,12 +11746,12 @@
         </p:nvSpPr>
         <p:spPr>
           <a:xfrm>
-            <a:off x="4322064" y="3954780"/>
-            <a:ext cx="3544824" cy="2080260"/>
+            <a:off x="4322064" y="4046220"/>
+            <a:ext cx="3544824" cy="2171700"/>
           </a:xfrm>
           <a:prstGeom prst="roundRect">
             <a:avLst>
-              <a:gd name="adj" fmla="val 3077"/>
+              <a:gd name="adj" fmla="val 2947"/>
             </a:avLst>
           </a:prstGeom>
           <a:solidFill>
@@ -11714,7 +11773,7 @@
         </p:nvSpPr>
         <p:spPr>
           <a:xfrm>
-            <a:off x="4523232" y="4155948"/>
+            <a:off x="4523232" y="4247388"/>
             <a:ext cx="457200" cy="457200"/>
           </a:xfrm>
           <a:prstGeom prst="roundRect">
@@ -11736,7 +11795,7 @@
         </p:nvSpPr>
         <p:spPr>
           <a:xfrm>
-            <a:off x="5099304" y="4137660"/>
+            <a:off x="5099304" y="4229100"/>
             <a:ext cx="2584704" cy="502920"/>
           </a:xfrm>
           <a:prstGeom prst="rect">
@@ -11753,7 +11812,7 @@
               <a:buNone/>
             </a:pPr>
             <a:r>
-              <a:rPr lang="en-US" sz="1500" b="1" dirty="0">
+              <a:rPr lang="en-US" sz="1450" b="1" dirty="0">
                 <a:solidFill>
                   <a:srgbClr val="263947"/>
                 </a:solidFill>
@@ -11763,7 +11822,7 @@
               </a:rPr>
               <a:t>TOPS</a:t>
             </a:r>
-            <a:endParaRPr lang="en-US" sz="1500" dirty="0"/>
+            <a:endParaRPr lang="en-US" sz="1450" dirty="0"/>
           </a:p>
         </p:txBody>
       </p:sp>
@@ -11775,8 +11834,8 @@
         </p:nvSpPr>
         <p:spPr>
           <a:xfrm>
-            <a:off x="4541520" y="4732020"/>
-            <a:ext cx="3105912" cy="1165860"/>
+            <a:off x="4541520" y="4823460"/>
+            <a:ext cx="3105912" cy="1257300"/>
           </a:xfrm>
           <a:prstGeom prst="rect">
             <a:avLst/>
@@ -11792,7 +11851,7 @@
               <a:buNone/>
             </a:pPr>
             <a:r>
-              <a:rPr lang="en-US" sz="1250" dirty="0">
+              <a:rPr lang="en-US" sz="1200" dirty="0">
                 <a:solidFill>
                   <a:srgbClr val="263947"/>
                 </a:solidFill>
@@ -11802,7 +11861,7 @@
               </a:rPr>
               <a:t>A peak arithmetic rating. Rarely the bottleneck — treat as marketing, not a benchmark.</a:t>
             </a:r>
-            <a:endParaRPr lang="en-US" sz="1250" dirty="0"/>
+            <a:endParaRPr lang="en-US" sz="1200" dirty="0"/>
           </a:p>
         </p:txBody>
       </p:sp>
@@ -11814,12 +11873,12 @@
         </p:nvSpPr>
         <p:spPr>
           <a:xfrm>
-            <a:off x="8186928" y="3954780"/>
-            <a:ext cx="3544824" cy="2080260"/>
+            <a:off x="8186928" y="4046220"/>
+            <a:ext cx="3544824" cy="2171700"/>
           </a:xfrm>
           <a:prstGeom prst="roundRect">
             <a:avLst>
-              <a:gd name="adj" fmla="val 3077"/>
+              <a:gd name="adj" fmla="val 2947"/>
             </a:avLst>
           </a:prstGeom>
           <a:solidFill>
@@ -11841,7 +11900,7 @@
         </p:nvSpPr>
         <p:spPr>
           <a:xfrm>
-            <a:off x="8388096" y="4155948"/>
+            <a:off x="8388096" y="4247388"/>
             <a:ext cx="457200" cy="457200"/>
           </a:xfrm>
           <a:prstGeom prst="roundRect">
@@ -11863,7 +11922,7 @@
         </p:nvSpPr>
         <p:spPr>
           <a:xfrm>
-            <a:off x="8964168" y="4137660"/>
+            <a:off x="8964168" y="4229100"/>
             <a:ext cx="2584704" cy="502920"/>
           </a:xfrm>
           <a:prstGeom prst="rect">
@@ -11880,7 +11939,7 @@
               <a:buNone/>
             </a:pPr>
             <a:r>
-              <a:rPr lang="en-US" sz="1500" b="1" dirty="0">
+              <a:rPr lang="en-US" sz="1450" b="1" dirty="0">
                 <a:solidFill>
                   <a:srgbClr val="263947"/>
                 </a:solidFill>
@@ -11890,7 +11949,7 @@
               </a:rPr>
               <a:t>Contract</a:t>
             </a:r>
-            <a:endParaRPr lang="en-US" sz="1500" dirty="0"/>
+            <a:endParaRPr lang="en-US" sz="1450" dirty="0"/>
           </a:p>
         </p:txBody>
       </p:sp>
@@ -11902,8 +11961,8 @@
         </p:nvSpPr>
         <p:spPr>
           <a:xfrm>
-            <a:off x="8406384" y="4732020"/>
-            <a:ext cx="3105912" cy="1165860"/>
+            <a:off x="8406384" y="4823460"/>
+            <a:ext cx="3105912" cy="1257300"/>
           </a:xfrm>
           <a:prstGeom prst="rect">
             <a:avLst/>
@@ -11919,7 +11978,7 @@
               <a:buNone/>
             </a:pPr>
             <a:r>
-              <a:rPr lang="en-US" sz="1250" dirty="0">
+              <a:rPr lang="en-US" sz="1200" dirty="0">
                 <a:solidFill>
                   <a:srgbClr val="263947"/>
                 </a:solidFill>
@@ -11929,7 +11988,7 @@
               </a:rPr>
               <a:t>What hardware promises software about execution, memory, numbers, scheduling, comms, and tooling.</a:t>
             </a:r>
-            <a:endParaRPr lang="en-US" sz="1250" dirty="0"/>
+            <a:endParaRPr lang="en-US" sz="1200" dirty="0"/>
           </a:p>
         </p:txBody>
       </p:sp>
@@ -11942,19 +12001,19 @@
         <p:spPr>
           <a:xfrm>
             <a:off x="457200" y="6473952"/>
-            <a:ext cx="6400800" cy="274320"/>
-          </a:xfrm>
-          <a:prstGeom prst="rect">
-            <a:avLst/>
-          </a:prstGeom>
-          <a:noFill/>
-          <a:ln/>
-        </p:spPr>
-        <p:txBody>
-          <a:bodyPr wrap="square" rtlCol="0" anchor="ctr"/>
-          <a:lstStyle/>
-          <a:p>
-            <a:pPr algn="l" indent="0" marL="0">
+            <a:ext cx="7315200" cy="274320"/>
+          </a:xfrm>
+          <a:prstGeom prst="rect">
+            <a:avLst/>
+          </a:prstGeom>
+          <a:noFill/>
+          <a:ln/>
+        </p:spPr>
+        <p:txBody>
+          <a:bodyPr wrap="square" rtlCol="0" anchor="ctr"/>
+          <a:lstStyle/>
+          <a:p>
+            <a:pPr indent="0" marL="0">
               <a:buNone/>
             </a:pPr>
             <a:r>
@@ -12233,19 +12292,19 @@
         <p:spPr>
           <a:xfrm>
             <a:off x="457200" y="6473952"/>
-            <a:ext cx="6400800" cy="274320"/>
-          </a:xfrm>
-          <a:prstGeom prst="rect">
-            <a:avLst/>
-          </a:prstGeom>
-          <a:noFill/>
-          <a:ln/>
-        </p:spPr>
-        <p:txBody>
-          <a:bodyPr wrap="square" rtlCol="0" anchor="ctr"/>
-          <a:lstStyle/>
-          <a:p>
-            <a:pPr algn="l" indent="0" marL="0">
+            <a:ext cx="7315200" cy="274320"/>
+          </a:xfrm>
+          <a:prstGeom prst="rect">
+            <a:avLst/>
+          </a:prstGeom>
+          <a:noFill/>
+          <a:ln/>
+        </p:spPr>
+        <p:txBody>
+          <a:bodyPr wrap="square" rtlCol="0" anchor="ctr"/>
+          <a:lstStyle/>
+          <a:p>
+            <a:pPr indent="0" marL="0">
               <a:buNone/>
             </a:pPr>
             <a:r>
@@ -12443,7 +12502,7 @@
         </p:nvSpPr>
         <p:spPr>
           <a:xfrm>
-            <a:off x="8138160" y="1801368"/>
+            <a:off x="8138160" y="1847088"/>
             <a:ext cx="109728" cy="109728"/>
           </a:xfrm>
           <a:prstGeom prst="rect">
@@ -12463,8 +12522,8 @@
         </p:nvSpPr>
         <p:spPr>
           <a:xfrm>
-            <a:off x="8366760" y="1627632"/>
-            <a:ext cx="3291840" cy="640080"/>
+            <a:off x="8366760" y="1673352"/>
+            <a:ext cx="3291840" cy="731520"/>
           </a:xfrm>
           <a:prstGeom prst="rect">
             <a:avLst/>
@@ -12480,7 +12539,7 @@
               <a:buNone/>
             </a:pPr>
             <a:r>
-              <a:rPr lang="en-US" sz="1350" dirty="0">
+              <a:rPr lang="en-US" sz="1300" dirty="0">
                 <a:solidFill>
                   <a:srgbClr val="263947"/>
                 </a:solidFill>
@@ -12490,7 +12549,7 @@
               </a:rPr>
               <a:t>Compute is nearly free.</a:t>
             </a:r>
-            <a:endParaRPr lang="en-US" sz="1350" dirty="0"/>
+            <a:endParaRPr lang="en-US" sz="1300" dirty="0"/>
           </a:p>
         </p:txBody>
       </p:sp>
@@ -12502,7 +12561,7 @@
         </p:nvSpPr>
         <p:spPr>
           <a:xfrm>
-            <a:off x="8138160" y="2551176"/>
+            <a:off x="8138160" y="2596896"/>
             <a:ext cx="109728" cy="109728"/>
           </a:xfrm>
           <a:prstGeom prst="rect">
@@ -12522,8 +12581,8 @@
         </p:nvSpPr>
         <p:spPr>
           <a:xfrm>
-            <a:off x="8366760" y="2377440"/>
-            <a:ext cx="3291840" cy="640080"/>
+            <a:off x="8366760" y="2423160"/>
+            <a:ext cx="3291840" cy="731520"/>
           </a:xfrm>
           <a:prstGeom prst="rect">
             <a:avLst/>
@@ -12539,7 +12598,7 @@
               <a:buNone/>
             </a:pPr>
             <a:r>
-              <a:rPr lang="en-US" sz="1350" dirty="0">
+              <a:rPr lang="en-US" sz="1300" dirty="0">
                 <a:solidFill>
                   <a:srgbClr val="263947"/>
                 </a:solidFill>
@@ -12549,7 +12608,7 @@
               </a:rPr>
               <a:t>Moving operands is not.</a:t>
             </a:r>
-            <a:endParaRPr lang="en-US" sz="1350" dirty="0"/>
+            <a:endParaRPr lang="en-US" sz="1300" dirty="0"/>
           </a:p>
         </p:txBody>
       </p:sp>
@@ -12561,7 +12620,7 @@
         </p:nvSpPr>
         <p:spPr>
           <a:xfrm>
-            <a:off x="8138160" y="3300984"/>
+            <a:off x="8138160" y="3346704"/>
             <a:ext cx="109728" cy="109728"/>
           </a:xfrm>
           <a:prstGeom prst="rect">
@@ -12581,8 +12640,8 @@
         </p:nvSpPr>
         <p:spPr>
           <a:xfrm>
-            <a:off x="8366760" y="3127248"/>
-            <a:ext cx="3291840" cy="640080"/>
+            <a:off x="8366760" y="3172968"/>
+            <a:ext cx="3291840" cy="731520"/>
           </a:xfrm>
           <a:prstGeom prst="rect">
             <a:avLst/>
@@ -12598,7 +12657,7 @@
               <a:buNone/>
             </a:pPr>
             <a:r>
-              <a:rPr lang="en-US" sz="1350" dirty="0">
+              <a:rPr lang="en-US" sz="1300" dirty="0">
                 <a:solidFill>
                   <a:srgbClr val="263947"/>
                 </a:solidFill>
@@ -12608,7 +12667,7 @@
               </a:rPr>
               <a:t>So locality and reuse set efficiency, not FLOPS.</a:t>
             </a:r>
-            <a:endParaRPr lang="en-US" sz="1350" dirty="0"/>
+            <a:endParaRPr lang="en-US" sz="1300" dirty="0"/>
           </a:p>
         </p:txBody>
       </p:sp>
@@ -12701,19 +12760,19 @@
         <p:spPr>
           <a:xfrm>
             <a:off x="457200" y="6473952"/>
-            <a:ext cx="6400800" cy="274320"/>
-          </a:xfrm>
-          <a:prstGeom prst="rect">
-            <a:avLst/>
-          </a:prstGeom>
-          <a:noFill/>
-          <a:ln/>
-        </p:spPr>
-        <p:txBody>
-          <a:bodyPr wrap="square" rtlCol="0" anchor="ctr"/>
-          <a:lstStyle/>
-          <a:p>
-            <a:pPr algn="l" indent="0" marL="0">
+            <a:ext cx="7315200" cy="274320"/>
+          </a:xfrm>
+          <a:prstGeom prst="rect">
+            <a:avLst/>
+          </a:prstGeom>
+          <a:noFill/>
+          <a:ln/>
+        </p:spPr>
+        <p:txBody>
+          <a:bodyPr wrap="square" rtlCol="0" anchor="ctr"/>
+          <a:lstStyle/>
+          <a:p>
+            <a:pPr indent="0" marL="0">
               <a:buNone/>
             </a:pPr>
             <a:r>
@@ -12911,7 +12970,7 @@
         </p:nvSpPr>
         <p:spPr>
           <a:xfrm>
-            <a:off x="8138160" y="1801368"/>
+            <a:off x="8138160" y="1847088"/>
             <a:ext cx="109728" cy="109728"/>
           </a:xfrm>
           <a:prstGeom prst="rect">
@@ -12931,8 +12990,8 @@
         </p:nvSpPr>
         <p:spPr>
           <a:xfrm>
-            <a:off x="8366760" y="1627632"/>
-            <a:ext cx="3291840" cy="640080"/>
+            <a:off x="8366760" y="1673352"/>
+            <a:ext cx="3291840" cy="731520"/>
           </a:xfrm>
           <a:prstGeom prst="rect">
             <a:avLst/>
@@ -12948,7 +13007,7 @@
               <a:buNone/>
             </a:pPr>
             <a:r>
-              <a:rPr lang="en-US" sz="1350" dirty="0">
+              <a:rPr lang="en-US" sz="1300" dirty="0">
                 <a:solidFill>
                   <a:srgbClr val="263947"/>
                 </a:solidFill>
@@ -12958,7 +13017,7 @@
               </a:rPr>
               <a:t>Each step out: more capacity.</a:t>
             </a:r>
-            <a:endParaRPr lang="en-US" sz="1350" dirty="0"/>
+            <a:endParaRPr lang="en-US" sz="1300" dirty="0"/>
           </a:p>
         </p:txBody>
       </p:sp>
@@ -12970,7 +13029,7 @@
         </p:nvSpPr>
         <p:spPr>
           <a:xfrm>
-            <a:off x="8138160" y="2551176"/>
+            <a:off x="8138160" y="2596896"/>
             <a:ext cx="109728" cy="109728"/>
           </a:xfrm>
           <a:prstGeom prst="rect">
@@ -12990,8 +13049,8 @@
         </p:nvSpPr>
         <p:spPr>
           <a:xfrm>
-            <a:off x="8366760" y="2377440"/>
-            <a:ext cx="3291840" cy="640080"/>
+            <a:off x="8366760" y="2423160"/>
+            <a:ext cx="3291840" cy="731520"/>
           </a:xfrm>
           <a:prstGeom prst="rect">
             <a:avLst/>
@@ -13007,7 +13066,7 @@
               <a:buNone/>
             </a:pPr>
             <a:r>
-              <a:rPr lang="en-US" sz="1350" dirty="0">
+              <a:rPr lang="en-US" sz="1300" dirty="0">
                 <a:solidFill>
                   <a:srgbClr val="263947"/>
                 </a:solidFill>
@@ -13017,7 +13076,7 @@
               </a:rPr>
               <a:t>Also more latency and energy.</a:t>
             </a:r>
-            <a:endParaRPr lang="en-US" sz="1350" dirty="0"/>
+            <a:endParaRPr lang="en-US" sz="1300" dirty="0"/>
           </a:p>
         </p:txBody>
       </p:sp>
@@ -13029,7 +13088,7 @@
         </p:nvSpPr>
         <p:spPr>
           <a:xfrm>
-            <a:off x="8138160" y="3300984"/>
+            <a:off x="8138160" y="3346704"/>
             <a:ext cx="109728" cy="109728"/>
           </a:xfrm>
           <a:prstGeom prst="rect">
@@ -13049,8 +13108,8 @@
         </p:nvSpPr>
         <p:spPr>
           <a:xfrm>
-            <a:off x="8366760" y="3127248"/>
-            <a:ext cx="3291840" cy="640080"/>
+            <a:off x="8366760" y="3172968"/>
+            <a:ext cx="3291840" cy="731520"/>
           </a:xfrm>
           <a:prstGeom prst="rect">
             <a:avLst/>
@@ -13066,7 +13125,7 @@
               <a:buNone/>
             </a:pPr>
             <a:r>
-              <a:rPr lang="en-US" sz="1350" dirty="0">
+              <a:rPr lang="en-US" sz="1300" dirty="0">
                 <a:solidFill>
                   <a:srgbClr val="263947"/>
                 </a:solidFill>
@@ -13076,7 +13135,7 @@
               </a:rPr>
               <a:t>Caches help only if data is reused before eviction.</a:t>
             </a:r>
-            <a:endParaRPr lang="en-US" sz="1350" dirty="0"/>
+            <a:endParaRPr lang="en-US" sz="1300" dirty="0"/>
           </a:p>
         </p:txBody>
       </p:sp>
@@ -13169,19 +13228,19 @@
         <p:spPr>
           <a:xfrm>
             <a:off x="457200" y="6473952"/>
-            <a:ext cx="6400800" cy="274320"/>
-          </a:xfrm>
-          <a:prstGeom prst="rect">
-            <a:avLst/>
-          </a:prstGeom>
-          <a:noFill/>
-          <a:ln/>
-        </p:spPr>
-        <p:txBody>
-          <a:bodyPr wrap="square" rtlCol="0" anchor="ctr"/>
-          <a:lstStyle/>
-          <a:p>
-            <a:pPr algn="l" indent="0" marL="0">
+            <a:ext cx="7315200" cy="274320"/>
+          </a:xfrm>
+          <a:prstGeom prst="rect">
+            <a:avLst/>
+          </a:prstGeom>
+          <a:noFill/>
+          <a:ln/>
+        </p:spPr>
+        <p:txBody>
+          <a:bodyPr wrap="square" rtlCol="0" anchor="ctr"/>
+          <a:lstStyle/>
+          <a:p>
+            <a:pPr indent="0" marL="0">
               <a:buNone/>
             </a:pPr>
             <a:r>
@@ -13379,7 +13438,7 @@
         </p:nvSpPr>
         <p:spPr>
           <a:xfrm>
-            <a:off x="8138160" y="1801368"/>
+            <a:off x="8138160" y="1847088"/>
             <a:ext cx="109728" cy="109728"/>
           </a:xfrm>
           <a:prstGeom prst="rect">
@@ -13399,8 +13458,8 @@
         </p:nvSpPr>
         <p:spPr>
           <a:xfrm>
-            <a:off x="8366760" y="1627632"/>
-            <a:ext cx="3291840" cy="640080"/>
+            <a:off x="8366760" y="1673352"/>
+            <a:ext cx="3291840" cy="731520"/>
           </a:xfrm>
           <a:prstGeom prst="rect">
             <a:avLst/>
@@ -13416,7 +13475,7 @@
               <a:buNone/>
             </a:pPr>
             <a:r>
-              <a:rPr lang="en-US" sz="1350" dirty="0">
+              <a:rPr lang="en-US" sz="1300" dirty="0">
                 <a:solidFill>
                   <a:srgbClr val="263947"/>
                 </a:solidFill>
@@ -13426,7 +13485,7 @@
               </a:rPr>
               <a:t>CPU: low-latency across diverse code.</a:t>
             </a:r>
-            <a:endParaRPr lang="en-US" sz="1350" dirty="0"/>
+            <a:endParaRPr lang="en-US" sz="1300" dirty="0"/>
           </a:p>
         </p:txBody>
       </p:sp>
@@ -13438,7 +13497,7 @@
         </p:nvSpPr>
         <p:spPr>
           <a:xfrm>
-            <a:off x="8138160" y="2551176"/>
+            <a:off x="8138160" y="2596896"/>
             <a:ext cx="109728" cy="109728"/>
           </a:xfrm>
           <a:prstGeom prst="rect">
@@ -13458,8 +13517,8 @@
         </p:nvSpPr>
         <p:spPr>
           <a:xfrm>
-            <a:off x="8366760" y="2377440"/>
-            <a:ext cx="3291840" cy="640080"/>
+            <a:off x="8366760" y="2423160"/>
+            <a:ext cx="3291840" cy="731520"/>
           </a:xfrm>
           <a:prstGeom prst="rect">
             <a:avLst/>
@@ -13475,7 +13534,7 @@
               <a:buNone/>
             </a:pPr>
             <a:r>
-              <a:rPr lang="en-US" sz="1350" dirty="0">
+              <a:rPr lang="en-US" sz="1300" dirty="0">
                 <a:solidFill>
                   <a:srgbClr val="263947"/>
                 </a:solidFill>
@@ -13485,7 +13544,7 @@
               </a:rPr>
               <a:t>GPU: throughput across regular work.</a:t>
             </a:r>
-            <a:endParaRPr lang="en-US" sz="1350" dirty="0"/>
+            <a:endParaRPr lang="en-US" sz="1300" dirty="0"/>
           </a:p>
         </p:txBody>
       </p:sp>
@@ -13497,7 +13556,7 @@
         </p:nvSpPr>
         <p:spPr>
           <a:xfrm>
-            <a:off x="8138160" y="3300984"/>
+            <a:off x="8138160" y="3346704"/>
             <a:ext cx="109728" cy="109728"/>
           </a:xfrm>
           <a:prstGeom prst="rect">
@@ -13517,8 +13576,8 @@
         </p:nvSpPr>
         <p:spPr>
           <a:xfrm>
-            <a:off x="8366760" y="3127248"/>
-            <a:ext cx="3291840" cy="640080"/>
+            <a:off x="8366760" y="3172968"/>
+            <a:ext cx="3291840" cy="731520"/>
           </a:xfrm>
           <a:prstGeom prst="rect">
             <a:avLst/>
@@ -13534,7 +13593,7 @@
               <a:buNone/>
             </a:pPr>
             <a:r>
-              <a:rPr lang="en-US" sz="1350" dirty="0">
+              <a:rPr lang="en-US" sz="1300" dirty="0">
                 <a:solidFill>
                   <a:srgbClr val="263947"/>
                 </a:solidFill>
@@ -13544,7 +13603,7 @@
               </a:rPr>
               <a:t>Neither is optimal for every phase.</a:t>
             </a:r>
-            <a:endParaRPr lang="en-US" sz="1350" dirty="0"/>
+            <a:endParaRPr lang="en-US" sz="1300" dirty="0"/>
           </a:p>
         </p:txBody>
       </p:sp>
@@ -13637,19 +13696,19 @@
         <p:spPr>
           <a:xfrm>
             <a:off x="457200" y="6473952"/>
-            <a:ext cx="6400800" cy="274320"/>
-          </a:xfrm>
-          <a:prstGeom prst="rect">
-            <a:avLst/>
-          </a:prstGeom>
-          <a:noFill/>
-          <a:ln/>
-        </p:spPr>
-        <p:txBody>
-          <a:bodyPr wrap="square" rtlCol="0" anchor="ctr"/>
-          <a:lstStyle/>
-          <a:p>
-            <a:pPr algn="l" indent="0" marL="0">
+            <a:ext cx="7315200" cy="274320"/>
+          </a:xfrm>
+          <a:prstGeom prst="rect">
+            <a:avLst/>
+          </a:prstGeom>
+          <a:noFill/>
+          <a:ln/>
+        </p:spPr>
+        <p:txBody>
+          <a:bodyPr wrap="square" rtlCol="0" anchor="ctr"/>
+          <a:lstStyle/>
+          <a:p>
+            <a:pPr indent="0" marL="0">
               <a:buNone/>
             </a:pPr>
             <a:r>
@@ -13847,7 +13906,7 @@
         </p:nvSpPr>
         <p:spPr>
           <a:xfrm>
-            <a:off x="8138160" y="1801368"/>
+            <a:off x="8138160" y="1847088"/>
             <a:ext cx="109728" cy="109728"/>
           </a:xfrm>
           <a:prstGeom prst="rect">
@@ -13867,8 +13926,8 @@
         </p:nvSpPr>
         <p:spPr>
           <a:xfrm>
-            <a:off x="8366760" y="1627632"/>
-            <a:ext cx="3291840" cy="640080"/>
+            <a:off x="8366760" y="1673352"/>
+            <a:ext cx="3291840" cy="731520"/>
           </a:xfrm>
           <a:prstGeom prst="rect">
             <a:avLst/>
@@ -13884,7 +13943,7 @@
               <a:buNone/>
             </a:pPr>
             <a:r>
-              <a:rPr lang="en-US" sz="1350" dirty="0">
+              <a:rPr lang="en-US" sz="1300" dirty="0">
                 <a:solidFill>
                   <a:srgbClr val="263947"/>
                 </a:solidFill>
@@ -13894,7 +13953,7 @@
               </a:rPr>
               <a:t>70B model, 8-bit, one sequence.</a:t>
             </a:r>
-            <a:endParaRPr lang="en-US" sz="1350" dirty="0"/>
+            <a:endParaRPr lang="en-US" sz="1300" dirty="0"/>
           </a:p>
         </p:txBody>
       </p:sp>
@@ -13906,7 +13965,7 @@
         </p:nvSpPr>
         <p:spPr>
           <a:xfrm>
-            <a:off x="8138160" y="2551176"/>
+            <a:off x="8138160" y="2596896"/>
             <a:ext cx="109728" cy="109728"/>
           </a:xfrm>
           <a:prstGeom prst="rect">
@@ -13926,8 +13985,8 @@
         </p:nvSpPr>
         <p:spPr>
           <a:xfrm>
-            <a:off x="8366760" y="2377440"/>
-            <a:ext cx="3291840" cy="640080"/>
+            <a:off x="8366760" y="2423160"/>
+            <a:ext cx="3291840" cy="731520"/>
           </a:xfrm>
           <a:prstGeom prst="rect">
             <a:avLst/>
@@ -13943,7 +14002,7 @@
               <a:buNone/>
             </a:pPr>
             <a:r>
-              <a:rPr lang="en-US" sz="1350" dirty="0">
+              <a:rPr lang="en-US" sz="1300" dirty="0">
                 <a:solidFill>
                   <a:srgbClr val="263947"/>
                 </a:solidFill>
@@ -13953,7 +14012,7 @@
               </a:rPr>
               <a:t>≈48 tokens/s ceiling on an H100.</a:t>
             </a:r>
-            <a:endParaRPr lang="en-US" sz="1350" dirty="0"/>
+            <a:endParaRPr lang="en-US" sz="1300" dirty="0"/>
           </a:p>
         </p:txBody>
       </p:sp>
@@ -13965,7 +14024,7 @@
         </p:nvSpPr>
         <p:spPr>
           <a:xfrm>
-            <a:off x="8138160" y="3300984"/>
+            <a:off x="8138160" y="3346704"/>
             <a:ext cx="109728" cy="109728"/>
           </a:xfrm>
           <a:prstGeom prst="rect">
@@ -13985,8 +14044,8 @@
         </p:nvSpPr>
         <p:spPr>
           <a:xfrm>
-            <a:off x="8366760" y="3127248"/>
-            <a:ext cx="3291840" cy="640080"/>
+            <a:off x="8366760" y="3172968"/>
+            <a:ext cx="3291840" cy="731520"/>
           </a:xfrm>
           <a:prstGeom prst="rect">
             <a:avLst/>
@@ -14002,7 +14061,7 @@
               <a:buNone/>
             </a:pPr>
             <a:r>
-              <a:rPr lang="en-US" sz="1350" dirty="0">
+              <a:rPr lang="en-US" sz="1300" dirty="0">
                 <a:solidFill>
                   <a:srgbClr val="263947"/>
                 </a:solidFill>
@@ -14012,7 +14071,7 @@
               </a:rPr>
               <a:t>~0.3% of the matrix throughput usable.</a:t>
             </a:r>
-            <a:endParaRPr lang="en-US" sz="1350" dirty="0"/>
+            <a:endParaRPr lang="en-US" sz="1300" dirty="0"/>
           </a:p>
         </p:txBody>
       </p:sp>
@@ -14105,19 +14164,19 @@
         <p:spPr>
           <a:xfrm>
             <a:off x="457200" y="6473952"/>
-            <a:ext cx="6400800" cy="274320"/>
-          </a:xfrm>
-          <a:prstGeom prst="rect">
-            <a:avLst/>
-          </a:prstGeom>
-          <a:noFill/>
-          <a:ln/>
-        </p:spPr>
-        <p:txBody>
-          <a:bodyPr wrap="square" rtlCol="0" anchor="ctr"/>
-          <a:lstStyle/>
-          <a:p>
-            <a:pPr algn="l" indent="0" marL="0">
+            <a:ext cx="7315200" cy="274320"/>
+          </a:xfrm>
+          <a:prstGeom prst="rect">
+            <a:avLst/>
+          </a:prstGeom>
+          <a:noFill/>
+          <a:ln/>
+        </p:spPr>
+        <p:txBody>
+          <a:bodyPr wrap="square" rtlCol="0" anchor="ctr"/>
+          <a:lstStyle/>
+          <a:p>
+            <a:pPr indent="0" marL="0">
               <a:buNone/>
             </a:pPr>
             <a:r>
@@ -14315,7 +14374,7 @@
         </p:nvSpPr>
         <p:spPr>
           <a:xfrm>
-            <a:off x="8138160" y="1801368"/>
+            <a:off x="8138160" y="1847088"/>
             <a:ext cx="109728" cy="109728"/>
           </a:xfrm>
           <a:prstGeom prst="rect">
@@ -14335,8 +14394,8 @@
         </p:nvSpPr>
         <p:spPr>
           <a:xfrm>
-            <a:off x="8366760" y="1627632"/>
-            <a:ext cx="3291840" cy="640080"/>
+            <a:off x="8366760" y="1673352"/>
+            <a:ext cx="3291840" cy="731520"/>
           </a:xfrm>
           <a:prstGeom prst="rect">
             <a:avLst/>
@@ -14352,7 +14411,7 @@
               <a:buNone/>
             </a:pPr>
             <a:r>
-              <a:rPr lang="en-US" sz="1350" dirty="0">
+              <a:rPr lang="en-US" sz="1300" dirty="0">
                 <a:solidFill>
                   <a:srgbClr val="263947"/>
                 </a:solidFill>
@@ -14362,7 +14421,7 @@
               </a:rPr>
               <a:t>Always-on tap: microwatts.</a:t>
             </a:r>
-            <a:endParaRPr lang="en-US" sz="1350" dirty="0"/>
+            <a:endParaRPr lang="en-US" sz="1300" dirty="0"/>
           </a:p>
         </p:txBody>
       </p:sp>
@@ -14374,7 +14433,7 @@
         </p:nvSpPr>
         <p:spPr>
           <a:xfrm>
-            <a:off x="8138160" y="2551176"/>
+            <a:off x="8138160" y="2596896"/>
             <a:ext cx="109728" cy="109728"/>
           </a:xfrm>
           <a:prstGeom prst="rect">
@@ -14394,8 +14453,8 @@
         </p:nvSpPr>
         <p:spPr>
           <a:xfrm>
-            <a:off x="8366760" y="2377440"/>
-            <a:ext cx="3291840" cy="640080"/>
+            <a:off x="8366760" y="2423160"/>
+            <a:ext cx="3291840" cy="731520"/>
           </a:xfrm>
           <a:prstGeom prst="rect">
             <a:avLst/>
@@ -14411,7 +14470,7 @@
               <a:buNone/>
             </a:pPr>
             <a:r>
-              <a:rPr lang="en-US" sz="1350" dirty="0">
+              <a:rPr lang="en-US" sz="1300" dirty="0">
                 <a:solidFill>
                   <a:srgbClr val="263947"/>
                 </a:solidFill>
@@ -14421,7 +14480,7 @@
               </a:rPr>
               <a:t>Cloud round-trip: ~watts.</a:t>
             </a:r>
-            <a:endParaRPr lang="en-US" sz="1350" dirty="0"/>
+            <a:endParaRPr lang="en-US" sz="1300" dirty="0"/>
           </a:p>
         </p:txBody>
       </p:sp>
@@ -14433,7 +14492,7 @@
         </p:nvSpPr>
         <p:spPr>
           <a:xfrm>
-            <a:off x="8138160" y="3300984"/>
+            <a:off x="8138160" y="3346704"/>
             <a:ext cx="109728" cy="109728"/>
           </a:xfrm>
           <a:prstGeom prst="rect">
@@ -14453,8 +14512,8 @@
         </p:nvSpPr>
         <p:spPr>
           <a:xfrm>
-            <a:off x="8366760" y="3127248"/>
-            <a:ext cx="3291840" cy="640080"/>
+            <a:off x="8366760" y="3172968"/>
+            <a:ext cx="3291840" cy="731520"/>
           </a:xfrm>
           <a:prstGeom prst="rect">
             <a:avLst/>
@@ -14470,7 +14529,7 @@
               <a:buNone/>
             </a:pPr>
             <a:r>
-              <a:rPr lang="en-US" sz="1350" dirty="0">
+              <a:rPr lang="en-US" sz="1300" dirty="0">
                 <a:solidFill>
                   <a:srgbClr val="263947"/>
                 </a:solidFill>
@@ -14480,7 +14539,7 @@
               </a:rPr>
               <a:t>Which domains wake sets the cost.</a:t>
             </a:r>
-            <a:endParaRPr lang="en-US" sz="1350" dirty="0"/>
+            <a:endParaRPr lang="en-US" sz="1300" dirty="0"/>
           </a:p>
         </p:txBody>
       </p:sp>
@@ -14573,19 +14632,19 @@
         <p:spPr>
           <a:xfrm>
             <a:off x="457200" y="6473952"/>
-            <a:ext cx="6400800" cy="274320"/>
-          </a:xfrm>
-          <a:prstGeom prst="rect">
-            <a:avLst/>
-          </a:prstGeom>
-          <a:noFill/>
-          <a:ln/>
-        </p:spPr>
-        <p:txBody>
-          <a:bodyPr wrap="square" rtlCol="0" anchor="ctr"/>
-          <a:lstStyle/>
-          <a:p>
-            <a:pPr algn="l" indent="0" marL="0">
+            <a:ext cx="7315200" cy="274320"/>
+          </a:xfrm>
+          <a:prstGeom prst="rect">
+            <a:avLst/>
+          </a:prstGeom>
+          <a:noFill/>
+          <a:ln/>
+        </p:spPr>
+        <p:txBody>
+          <a:bodyPr wrap="square" rtlCol="0" anchor="ctr"/>
+          <a:lstStyle/>
+          <a:p>
+            <a:pPr indent="0" marL="0">
               <a:buNone/>
             </a:pPr>
             <a:r>
